--- a/output_pptx/His_Mercy_Is_More.pptx
+++ b/output_pptx/His_Mercy_Is_More.pptx
@@ -3129,23 +3129,23 @@
         </p:nvSpPr>
         <p:spPr>
           <a:xfrm>
-            <a:off x="594360" y="2258568"/>
-            <a:ext cx="11002975" cy="685800"/>
-          </a:xfrm>
-          <a:prstGeom prst="rect">
-            <a:avLst/>
-          </a:prstGeom>
-          <a:noFill/>
-        </p:spPr>
-        <p:txBody>
-          <a:bodyPr wrap="square">
-            <a:spAutoFit/>
-          </a:bodyPr>
-          <a:lstStyle/>
-          <a:p>
-            <a:pPr algn="ctr"/>
-            <a:r>
-              <a:rPr sz="4400" b="1" i="0">
+            <a:off x="640080" y="2052828"/>
+            <a:ext cx="10911535" cy="731520"/>
+          </a:xfrm>
+          <a:prstGeom prst="rect">
+            <a:avLst/>
+          </a:prstGeom>
+          <a:noFill/>
+        </p:spPr>
+        <p:txBody>
+          <a:bodyPr wrap="square">
+            <a:spAutoFit/>
+          </a:bodyPr>
+          <a:lstStyle/>
+          <a:p>
+            <a:pPr algn="ctr"/>
+            <a:r>
+              <a:rPr sz="4800" b="1" i="0">
                 <a:solidFill>
                   <a:srgbClr val="FFFFFF"/>
                 </a:solidFill>
@@ -3164,25 +3164,60 @@
         </p:nvSpPr>
         <p:spPr>
           <a:xfrm>
-            <a:off x="594360" y="2980944"/>
-            <a:ext cx="11002975" cy="347472"/>
-          </a:xfrm>
-          <a:prstGeom prst="rect">
-            <a:avLst/>
-          </a:prstGeom>
-          <a:noFill/>
-        </p:spPr>
-        <p:txBody>
-          <a:bodyPr wrap="square">
-            <a:spAutoFit/>
-          </a:bodyPr>
-          <a:lstStyle/>
-          <a:p>
-            <a:pPr algn="ctr"/>
-            <a:r>
-              <a:rPr sz="2200" b="0" i="1">
-                <a:solidFill>
-                  <a:srgbClr val="8C8C8C"/>
+            <a:off x="640080" y="2985516"/>
+            <a:ext cx="10911535" cy="731520"/>
+          </a:xfrm>
+          <a:prstGeom prst="rect">
+            <a:avLst/>
+          </a:prstGeom>
+          <a:noFill/>
+        </p:spPr>
+        <p:txBody>
+          <a:bodyPr wrap="square">
+            <a:spAutoFit/>
+          </a:bodyPr>
+          <a:lstStyle/>
+          <a:p>
+            <a:pPr algn="ctr"/>
+            <a:r>
+              <a:rPr sz="4600" b="1" i="0">
+                <a:solidFill>
+                  <a:srgbClr val="FFFFFF"/>
+                </a:solidFill>
+                <a:latin typeface="Arial"/>
+              </a:rPr>
+              <a:t>Nenhum erro que tenhamos cometido</a:t>
+            </a:r>
+          </a:p>
+        </p:txBody>
+      </p:sp>
+      <p:sp>
+        <p:nvSpPr>
+          <p:cNvPr id="4" name="TextBox 3"/>
+          <p:cNvSpPr txBox="1"/>
+          <p:nvPr/>
+        </p:nvSpPr>
+        <p:spPr>
+          <a:xfrm>
+            <a:off x="640080" y="4128516"/>
+            <a:ext cx="10911535" cy="310896"/>
+          </a:xfrm>
+          <a:prstGeom prst="rect">
+            <a:avLst/>
+          </a:prstGeom>
+          <a:noFill/>
+        </p:spPr>
+        <p:txBody>
+          <a:bodyPr wrap="square">
+            <a:spAutoFit/>
+          </a:bodyPr>
+          <a:lstStyle/>
+          <a:p>
+            <a:pPr algn="ctr"/>
+            <a:r>
+              <a:rPr sz="2000" b="0" i="0">
+                <a:solidFill>
+                  <a:srgbClr val="828282"/>
                 </a:solidFill>
                 <a:latin typeface="Arial"/>
               </a:rPr>
@@ -3193,66 +3228,31 @@
       </p:sp>
       <p:sp>
         <p:nvSpPr>
-          <p:cNvPr id="4" name="TextBox 3"/>
-          <p:cNvSpPr txBox="1"/>
-          <p:nvPr/>
-        </p:nvSpPr>
-        <p:spPr>
-          <a:xfrm>
-            <a:off x="594360" y="3529584"/>
-            <a:ext cx="11002975" cy="685800"/>
-          </a:xfrm>
-          <a:prstGeom prst="rect">
-            <a:avLst/>
-          </a:prstGeom>
-          <a:noFill/>
-        </p:spPr>
-        <p:txBody>
-          <a:bodyPr wrap="square">
-            <a:spAutoFit/>
-          </a:bodyPr>
-          <a:lstStyle/>
-          <a:p>
-            <a:pPr algn="ctr"/>
-            <a:r>
-              <a:rPr sz="4266" b="1" i="0">
-                <a:solidFill>
-                  <a:srgbClr val="FFFFFF"/>
-                </a:solidFill>
-                <a:latin typeface="Arial"/>
-              </a:rPr>
-              <a:t>Nenhum erro que tenhamos cometido</a:t>
-            </a:r>
-          </a:p>
-        </p:txBody>
-      </p:sp>
-      <p:sp>
-        <p:nvSpPr>
           <p:cNvPr id="5" name="TextBox 4"/>
           <p:cNvSpPr txBox="1"/>
           <p:nvPr/>
         </p:nvSpPr>
         <p:spPr>
           <a:xfrm>
-            <a:off x="594360" y="4251960"/>
-            <a:ext cx="11002975" cy="347472"/>
-          </a:xfrm>
-          <a:prstGeom prst="rect">
-            <a:avLst/>
-          </a:prstGeom>
-          <a:noFill/>
-        </p:spPr>
-        <p:txBody>
-          <a:bodyPr wrap="square">
-            <a:spAutoFit/>
-          </a:bodyPr>
-          <a:lstStyle/>
-          <a:p>
-            <a:pPr algn="ctr"/>
-            <a:r>
-              <a:rPr sz="2200" b="0" i="1">
-                <a:solidFill>
-                  <a:srgbClr val="8C8C8C"/>
+            <a:off x="640080" y="4494276"/>
+            <a:ext cx="10911535" cy="310896"/>
+          </a:xfrm>
+          <a:prstGeom prst="rect">
+            <a:avLst/>
+          </a:prstGeom>
+          <a:noFill/>
+        </p:spPr>
+        <p:txBody>
+          <a:bodyPr wrap="square">
+            <a:spAutoFit/>
+          </a:bodyPr>
+          <a:lstStyle/>
+          <a:p>
+            <a:pPr algn="ctr"/>
+            <a:r>
+              <a:rPr sz="2000" b="0" i="0">
+                <a:solidFill>
+                  <a:srgbClr val="828282"/>
                 </a:solidFill>
                 <a:latin typeface="Arial"/>
               </a:rPr>
@@ -3295,23 +3295,23 @@
         </p:nvSpPr>
         <p:spPr>
           <a:xfrm>
-            <a:off x="594360" y="2258568"/>
-            <a:ext cx="11002975" cy="685800"/>
-          </a:xfrm>
-          <a:prstGeom prst="rect">
-            <a:avLst/>
-          </a:prstGeom>
-          <a:noFill/>
-        </p:spPr>
-        <p:txBody>
-          <a:bodyPr wrap="square">
-            <a:spAutoFit/>
-          </a:bodyPr>
-          <a:lstStyle/>
-          <a:p>
-            <a:pPr algn="ctr"/>
-            <a:r>
-              <a:rPr sz="4400" b="1" i="0">
+            <a:off x="640080" y="2052828"/>
+            <a:ext cx="10911535" cy="731520"/>
+          </a:xfrm>
+          <a:prstGeom prst="rect">
+            <a:avLst/>
+          </a:prstGeom>
+          <a:noFill/>
+        </p:spPr>
+        <p:txBody>
+          <a:bodyPr wrap="square">
+            <a:spAutoFit/>
+          </a:bodyPr>
+          <a:lstStyle/>
+          <a:p>
+            <a:pPr algn="ctr"/>
+            <a:r>
+              <a:rPr sz="4800" b="1" i="0">
                 <a:solidFill>
                   <a:srgbClr val="FFFFFF"/>
                 </a:solidFill>
@@ -3330,99 +3330,64 @@
         </p:nvSpPr>
         <p:spPr>
           <a:xfrm>
-            <a:off x="594360" y="2980944"/>
-            <a:ext cx="11002975" cy="347472"/>
-          </a:xfrm>
-          <a:prstGeom prst="rect">
-            <a:avLst/>
-          </a:prstGeom>
-          <a:noFill/>
-        </p:spPr>
-        <p:txBody>
-          <a:bodyPr wrap="square">
-            <a:spAutoFit/>
-          </a:bodyPr>
-          <a:lstStyle/>
-          <a:p>
-            <a:pPr algn="ctr"/>
-            <a:r>
-              <a:rPr sz="2200" b="0" i="1">
-                <a:solidFill>
-                  <a:srgbClr val="8C8C8C"/>
+            <a:off x="640080" y="2985516"/>
+            <a:ext cx="10911535" cy="731520"/>
+          </a:xfrm>
+          <a:prstGeom prst="rect">
+            <a:avLst/>
+          </a:prstGeom>
+          <a:noFill/>
+        </p:spPr>
+        <p:txBody>
+          <a:bodyPr wrap="square">
+            <a:spAutoFit/>
+          </a:bodyPr>
+          <a:lstStyle/>
+          <a:p>
+            <a:pPr algn="ctr"/>
+            <a:r>
+              <a:rPr sz="4800" b="1" i="0">
+                <a:solidFill>
+                  <a:srgbClr val="FFFFFF"/>
+                </a:solidFill>
+                <a:latin typeface="Arial"/>
+              </a:rPr>
+              <a:t>Sua misericórdia é mais</a:t>
+            </a:r>
+          </a:p>
+        </p:txBody>
+      </p:sp>
+      <p:sp>
+        <p:nvSpPr>
+          <p:cNvPr id="4" name="TextBox 3"/>
+          <p:cNvSpPr txBox="1"/>
+          <p:nvPr/>
+        </p:nvSpPr>
+        <p:spPr>
+          <a:xfrm>
+            <a:off x="640080" y="4128516"/>
+            <a:ext cx="10911535" cy="310896"/>
+          </a:xfrm>
+          <a:prstGeom prst="rect">
+            <a:avLst/>
+          </a:prstGeom>
+          <a:noFill/>
+        </p:spPr>
+        <p:txBody>
+          <a:bodyPr wrap="square">
+            <a:spAutoFit/>
+          </a:bodyPr>
+          <a:lstStyle/>
+          <a:p>
+            <a:pPr algn="ctr"/>
+            <a:r>
+              <a:rPr sz="2000" b="0" i="0">
+                <a:solidFill>
+                  <a:srgbClr val="828282"/>
                 </a:solidFill>
                 <a:latin typeface="Arial"/>
               </a:rPr>
               <a:t>つみより深い あわれみ</a:t>
-            </a:r>
-          </a:p>
-        </p:txBody>
-      </p:sp>
-      <p:sp>
-        <p:nvSpPr>
-          <p:cNvPr id="4" name="TextBox 3"/>
-          <p:cNvSpPr txBox="1"/>
-          <p:nvPr/>
-        </p:nvSpPr>
-        <p:spPr>
-          <a:xfrm>
-            <a:off x="594360" y="3529584"/>
-            <a:ext cx="11002975" cy="685800"/>
-          </a:xfrm>
-          <a:prstGeom prst="rect">
-            <a:avLst/>
-          </a:prstGeom>
-          <a:noFill/>
-        </p:spPr>
-        <p:txBody>
-          <a:bodyPr wrap="square">
-            <a:spAutoFit/>
-          </a:bodyPr>
-          <a:lstStyle/>
-          <a:p>
-            <a:pPr algn="ctr"/>
-            <a:r>
-              <a:rPr sz="4400" b="1" i="0">
-                <a:solidFill>
-                  <a:srgbClr val="FFFFFF"/>
-                </a:solidFill>
-                <a:latin typeface="Arial"/>
-              </a:rPr>
-              <a:t>Sua misericórdia é mais</a:t>
-            </a:r>
-          </a:p>
-        </p:txBody>
-      </p:sp>
-      <p:sp>
-        <p:nvSpPr>
-          <p:cNvPr id="5" name="TextBox 4"/>
-          <p:cNvSpPr txBox="1"/>
-          <p:nvPr/>
-        </p:nvSpPr>
-        <p:spPr>
-          <a:xfrm>
-            <a:off x="594360" y="4251960"/>
-            <a:ext cx="11002975" cy="347472"/>
-          </a:xfrm>
-          <a:prstGeom prst="rect">
-            <a:avLst/>
-          </a:prstGeom>
-          <a:noFill/>
-        </p:spPr>
-        <p:txBody>
-          <a:bodyPr wrap="square">
-            <a:spAutoFit/>
-          </a:bodyPr>
-          <a:lstStyle/>
-          <a:p>
-            <a:pPr algn="ctr"/>
-            <a:r>
-              <a:rPr sz="2200" b="0" i="1">
-                <a:solidFill>
-                  <a:srgbClr val="8C8C8C"/>
-                </a:solidFill>
-                <a:latin typeface="Arial"/>
-              </a:rPr>
-              <a:t/>
             </a:r>
           </a:p>
         </p:txBody>
@@ -3461,23 +3426,23 @@
         </p:nvSpPr>
         <p:spPr>
           <a:xfrm>
-            <a:off x="594360" y="2258568"/>
-            <a:ext cx="11002975" cy="685800"/>
-          </a:xfrm>
-          <a:prstGeom prst="rect">
-            <a:avLst/>
-          </a:prstGeom>
-          <a:noFill/>
-        </p:spPr>
-        <p:txBody>
-          <a:bodyPr wrap="square">
-            <a:spAutoFit/>
-          </a:bodyPr>
-          <a:lstStyle/>
-          <a:p>
-            <a:pPr algn="ctr"/>
-            <a:r>
-              <a:rPr sz="4400" b="1" i="0">
+            <a:off x="640080" y="2052828"/>
+            <a:ext cx="10911535" cy="731520"/>
+          </a:xfrm>
+          <a:prstGeom prst="rect">
+            <a:avLst/>
+          </a:prstGeom>
+          <a:noFill/>
+        </p:spPr>
+        <p:txBody>
+          <a:bodyPr wrap="square">
+            <a:spAutoFit/>
+          </a:bodyPr>
+          <a:lstStyle/>
+          <a:p>
+            <a:pPr algn="ctr"/>
+            <a:r>
+              <a:rPr sz="4800" b="1" i="0">
                 <a:solidFill>
                   <a:srgbClr val="FFFFFF"/>
                 </a:solidFill>
@@ -3496,99 +3461,29 @@
         </p:nvSpPr>
         <p:spPr>
           <a:xfrm>
-            <a:off x="594360" y="2980944"/>
-            <a:ext cx="11002975" cy="347472"/>
-          </a:xfrm>
-          <a:prstGeom prst="rect">
-            <a:avLst/>
-          </a:prstGeom>
-          <a:noFill/>
-        </p:spPr>
-        <p:txBody>
-          <a:bodyPr wrap="square">
-            <a:spAutoFit/>
-          </a:bodyPr>
-          <a:lstStyle/>
-          <a:p>
-            <a:pPr algn="ctr"/>
-            <a:r>
-              <a:rPr sz="2200" b="0" i="1">
-                <a:solidFill>
-                  <a:srgbClr val="8C8C8C"/>
-                </a:solidFill>
-                <a:latin typeface="Arial"/>
-              </a:rPr>
-              <a:t/>
-            </a:r>
-          </a:p>
-        </p:txBody>
-      </p:sp>
-      <p:sp>
-        <p:nvSpPr>
-          <p:cNvPr id="4" name="TextBox 3"/>
-          <p:cNvSpPr txBox="1"/>
-          <p:nvPr/>
-        </p:nvSpPr>
-        <p:spPr>
-          <a:xfrm>
-            <a:off x="594360" y="3529584"/>
-            <a:ext cx="11002975" cy="685800"/>
-          </a:xfrm>
-          <a:prstGeom prst="rect">
-            <a:avLst/>
-          </a:prstGeom>
-          <a:noFill/>
-        </p:spPr>
-        <p:txBody>
-          <a:bodyPr wrap="square">
-            <a:spAutoFit/>
-          </a:bodyPr>
-          <a:lstStyle/>
-          <a:p>
-            <a:pPr algn="ctr"/>
-            <a:r>
-              <a:rPr sz="4400" b="1" i="0">
+            <a:off x="640080" y="2985516"/>
+            <a:ext cx="10911535" cy="731520"/>
+          </a:xfrm>
+          <a:prstGeom prst="rect">
+            <a:avLst/>
+          </a:prstGeom>
+          <a:noFill/>
+        </p:spPr>
+        <p:txBody>
+          <a:bodyPr wrap="square">
+            <a:spAutoFit/>
+          </a:bodyPr>
+          <a:lstStyle/>
+          <a:p>
+            <a:pPr algn="ctr"/>
+            <a:r>
+              <a:rPr sz="4800" b="1" i="0">
                 <a:solidFill>
                   <a:srgbClr val="FFFFFF"/>
                 </a:solidFill>
                 <a:latin typeface="Arial"/>
               </a:rPr>
               <a:t>Sua misericórdia é mais</a:t>
-            </a:r>
-          </a:p>
-        </p:txBody>
-      </p:sp>
-      <p:sp>
-        <p:nvSpPr>
-          <p:cNvPr id="5" name="TextBox 4"/>
-          <p:cNvSpPr txBox="1"/>
-          <p:nvPr/>
-        </p:nvSpPr>
-        <p:spPr>
-          <a:xfrm>
-            <a:off x="594360" y="4251960"/>
-            <a:ext cx="11002975" cy="347472"/>
-          </a:xfrm>
-          <a:prstGeom prst="rect">
-            <a:avLst/>
-          </a:prstGeom>
-          <a:noFill/>
-        </p:spPr>
-        <p:txBody>
-          <a:bodyPr wrap="square">
-            <a:spAutoFit/>
-          </a:bodyPr>
-          <a:lstStyle/>
-          <a:p>
-            <a:pPr algn="ctr"/>
-            <a:r>
-              <a:rPr sz="2200" b="0" i="1">
-                <a:solidFill>
-                  <a:srgbClr val="8C8C8C"/>
-                </a:solidFill>
-                <a:latin typeface="Arial"/>
-              </a:rPr>
-              <a:t/>
             </a:r>
           </a:p>
         </p:txBody>
@@ -3627,23 +3522,23 @@
         </p:nvSpPr>
         <p:spPr>
           <a:xfrm>
-            <a:off x="594360" y="1837944"/>
-            <a:ext cx="11002975" cy="685800"/>
-          </a:xfrm>
-          <a:prstGeom prst="rect">
-            <a:avLst/>
-          </a:prstGeom>
-          <a:noFill/>
-        </p:spPr>
-        <p:txBody>
-          <a:bodyPr wrap="square">
-            <a:spAutoFit/>
-          </a:bodyPr>
-          <a:lstStyle/>
-          <a:p>
-            <a:pPr algn="ctr"/>
-            <a:r>
-              <a:rPr sz="4400" b="1" i="0">
+            <a:off x="640080" y="1650492"/>
+            <a:ext cx="10911535" cy="731520"/>
+          </a:xfrm>
+          <a:prstGeom prst="rect">
+            <a:avLst/>
+          </a:prstGeom>
+          <a:noFill/>
+        </p:spPr>
+        <p:txBody>
+          <a:bodyPr wrap="square">
+            <a:spAutoFit/>
+          </a:bodyPr>
+          <a:lstStyle/>
+          <a:p>
+            <a:pPr algn="ctr"/>
+            <a:r>
+              <a:rPr sz="4800" b="1" i="0">
                 <a:solidFill>
                   <a:srgbClr val="FFFFFF"/>
                 </a:solidFill>
@@ -3662,8 +3557,8 @@
         </p:nvSpPr>
         <p:spPr>
           <a:xfrm>
-            <a:off x="594360" y="2560320"/>
-            <a:ext cx="11002975" cy="384048"/>
+            <a:off x="640080" y="2418588"/>
+            <a:ext cx="10911535" cy="365760"/>
           </a:xfrm>
           <a:prstGeom prst="rect">
             <a:avLst/>
@@ -3680,7 +3575,7 @@
             <a:r>
               <a:rPr sz="2400" b="0" i="1">
                 <a:solidFill>
-                  <a:srgbClr val="B4B4B4"/>
+                  <a:srgbClr val="AAAAAA"/>
                 </a:solidFill>
                 <a:latin typeface="Arial"/>
               </a:rPr>
@@ -3697,8 +3592,78 @@
         </p:nvSpPr>
         <p:spPr>
           <a:xfrm>
-            <a:off x="594360" y="2980944"/>
-            <a:ext cx="11002975" cy="347472"/>
+            <a:off x="640080" y="2985516"/>
+            <a:ext cx="10911535" cy="731520"/>
+          </a:xfrm>
+          <a:prstGeom prst="rect">
+            <a:avLst/>
+          </a:prstGeom>
+          <a:noFill/>
+        </p:spPr>
+        <p:txBody>
+          <a:bodyPr wrap="square">
+            <a:spAutoFit/>
+          </a:bodyPr>
+          <a:lstStyle/>
+          <a:p>
+            <a:pPr algn="ctr"/>
+            <a:r>
+              <a:rPr sz="4800" b="1" i="0">
+                <a:solidFill>
+                  <a:srgbClr val="FFFFFF"/>
+                </a:solidFill>
+                <a:latin typeface="Arial"/>
+              </a:rPr>
+              <a:t>ちち   はし   の   び待 ち続け</a:t>
+            </a:r>
+          </a:p>
+        </p:txBody>
+      </p:sp>
+      <p:sp>
+        <p:nvSpPr>
+          <p:cNvPr id="5" name="TextBox 4"/>
+          <p:cNvSpPr txBox="1"/>
+          <p:nvPr/>
+        </p:nvSpPr>
+        <p:spPr>
+          <a:xfrm>
+            <a:off x="640080" y="3753612"/>
+            <a:ext cx="10911535" cy="365760"/>
+          </a:xfrm>
+          <a:prstGeom prst="rect">
+            <a:avLst/>
+          </a:prstGeom>
+          <a:noFill/>
+        </p:spPr>
+        <p:txBody>
+          <a:bodyPr wrap="square">
+            <a:spAutoFit/>
+          </a:bodyPr>
+          <a:lstStyle/>
+          <a:p>
+            <a:pPr algn="ctr"/>
+            <a:r>
+              <a:rPr sz="2400" b="0" i="1">
+                <a:solidFill>
+                  <a:srgbClr val="AAAAAA"/>
+                </a:solidFill>
+                <a:latin typeface="Arial"/>
+              </a:rPr>
+              <a:t>chichi washi nobima   chitsu zuke</a:t>
+            </a:r>
+          </a:p>
+        </p:txBody>
+      </p:sp>
+      <p:sp>
+        <p:nvSpPr>
+          <p:cNvPr id="6" name="TextBox 5"/>
+          <p:cNvSpPr txBox="1"/>
+          <p:nvPr/>
+        </p:nvSpPr>
+        <p:spPr>
+          <a:xfrm>
+            <a:off x="640080" y="4530852"/>
+            <a:ext cx="10911535" cy="310896"/>
           </a:xfrm>
           <a:prstGeom prst="rect">
             <a:avLst/>
@@ -3715,7 +3680,7 @@
             <a:r>
               <a:rPr sz="2000" b="0" i="1">
                 <a:solidFill>
-                  <a:srgbClr val="8C8C8C"/>
+                  <a:srgbClr val="828282"/>
                 </a:solidFill>
                 <a:latin typeface="Arial"/>
               </a:rPr>
@@ -3726,84 +3691,14 @@
       </p:sp>
       <p:sp>
         <p:nvSpPr>
-          <p:cNvPr id="5" name="TextBox 4"/>
-          <p:cNvSpPr txBox="1"/>
-          <p:nvPr/>
-        </p:nvSpPr>
-        <p:spPr>
-          <a:xfrm>
-            <a:off x="594360" y="3529584"/>
-            <a:ext cx="11002975" cy="685800"/>
-          </a:xfrm>
-          <a:prstGeom prst="rect">
-            <a:avLst/>
-          </a:prstGeom>
-          <a:noFill/>
-        </p:spPr>
-        <p:txBody>
-          <a:bodyPr wrap="square">
-            <a:spAutoFit/>
-          </a:bodyPr>
-          <a:lstStyle/>
-          <a:p>
-            <a:pPr algn="ctr"/>
-            <a:r>
-              <a:rPr sz="4400" b="1" i="0">
-                <a:solidFill>
-                  <a:srgbClr val="FFFFFF"/>
-                </a:solidFill>
-                <a:latin typeface="Arial"/>
-              </a:rPr>
-              <a:t>ちち   はし   の   び待 ち続け</a:t>
-            </a:r>
-          </a:p>
-        </p:txBody>
-      </p:sp>
-      <p:sp>
-        <p:nvSpPr>
-          <p:cNvPr id="6" name="TextBox 5"/>
-          <p:cNvSpPr txBox="1"/>
-          <p:nvPr/>
-        </p:nvSpPr>
-        <p:spPr>
-          <a:xfrm>
-            <a:off x="594360" y="4251960"/>
-            <a:ext cx="11002975" cy="384048"/>
-          </a:xfrm>
-          <a:prstGeom prst="rect">
-            <a:avLst/>
-          </a:prstGeom>
-          <a:noFill/>
-        </p:spPr>
-        <p:txBody>
-          <a:bodyPr wrap="square">
-            <a:spAutoFit/>
-          </a:bodyPr>
-          <a:lstStyle/>
-          <a:p>
-            <a:pPr algn="ctr"/>
-            <a:r>
-              <a:rPr sz="2400" b="0" i="1">
-                <a:solidFill>
-                  <a:srgbClr val="B4B4B4"/>
-                </a:solidFill>
-                <a:latin typeface="Arial"/>
-              </a:rPr>
-              <a:t>chichi washi nobima   chitsu zuke</a:t>
-            </a:r>
-          </a:p>
-        </p:txBody>
-      </p:sp>
-      <p:sp>
-        <p:nvSpPr>
           <p:cNvPr id="7" name="TextBox 6"/>
           <p:cNvSpPr txBox="1"/>
           <p:nvPr/>
         </p:nvSpPr>
         <p:spPr>
           <a:xfrm>
-            <a:off x="594360" y="4672584"/>
-            <a:ext cx="11002975" cy="347472"/>
+            <a:off x="640080" y="4896612"/>
+            <a:ext cx="10911535" cy="310896"/>
           </a:xfrm>
           <a:prstGeom prst="rect">
             <a:avLst/>
@@ -3820,7 +3715,7 @@
             <a:r>
               <a:rPr sz="2000" b="0" i="1">
                 <a:solidFill>
-                  <a:srgbClr val="8C8C8C"/>
+                  <a:srgbClr val="828282"/>
                 </a:solidFill>
                 <a:latin typeface="Arial"/>
               </a:rPr>
@@ -3863,23 +3758,23 @@
         </p:nvSpPr>
         <p:spPr>
           <a:xfrm>
-            <a:off x="594360" y="1837944"/>
-            <a:ext cx="11002975" cy="685800"/>
-          </a:xfrm>
-          <a:prstGeom prst="rect">
-            <a:avLst/>
-          </a:prstGeom>
-          <a:noFill/>
-        </p:spPr>
-        <p:txBody>
-          <a:bodyPr wrap="square">
-            <a:spAutoFit/>
-          </a:bodyPr>
-          <a:lstStyle/>
-          <a:p>
-            <a:pPr algn="ctr"/>
-            <a:r>
-              <a:rPr sz="4400" b="1" i="0">
+            <a:off x="640080" y="1650492"/>
+            <a:ext cx="10911535" cy="731520"/>
+          </a:xfrm>
+          <a:prstGeom prst="rect">
+            <a:avLst/>
+          </a:prstGeom>
+          <a:noFill/>
+        </p:spPr>
+        <p:txBody>
+          <a:bodyPr wrap="square">
+            <a:spAutoFit/>
+          </a:bodyPr>
+          <a:lstStyle/>
+          <a:p>
+            <a:pPr algn="ctr"/>
+            <a:r>
+              <a:rPr sz="4800" b="1" i="0">
                 <a:solidFill>
                   <a:srgbClr val="FFFFFF"/>
                 </a:solidFill>
@@ -3898,8 +3793,8 @@
         </p:nvSpPr>
         <p:spPr>
           <a:xfrm>
-            <a:off x="594360" y="2560320"/>
-            <a:ext cx="11002975" cy="384048"/>
+            <a:off x="640080" y="2418588"/>
+            <a:ext cx="10911535" cy="365760"/>
           </a:xfrm>
           <a:prstGeom prst="rect">
             <a:avLst/>
@@ -3916,7 +3811,7 @@
             <a:r>
               <a:rPr sz="2400" b="0" i="1">
                 <a:solidFill>
-                  <a:srgbClr val="B4B4B4"/>
+                  <a:srgbClr val="AAAAAA"/>
                 </a:solidFill>
                 <a:latin typeface="Arial"/>
               </a:rPr>
@@ -3933,8 +3828,78 @@
         </p:nvSpPr>
         <p:spPr>
           <a:xfrm>
-            <a:off x="594360" y="2980944"/>
-            <a:ext cx="11002975" cy="347472"/>
+            <a:off x="640080" y="2985516"/>
+            <a:ext cx="10911535" cy="731520"/>
+          </a:xfrm>
+          <a:prstGeom prst="rect">
+            <a:avLst/>
+          </a:prstGeom>
+          <a:noFill/>
+        </p:spPr>
+        <p:txBody>
+          <a:bodyPr wrap="square">
+            <a:spAutoFit/>
+          </a:bodyPr>
+          <a:lstStyle/>
+          <a:p>
+            <a:pPr algn="ctr"/>
+            <a:r>
+              <a:rPr sz="4800" b="1" i="0">
+                <a:solidFill>
+                  <a:srgbClr val="FFFFFF"/>
+                </a:solidFill>
+                <a:latin typeface="Arial"/>
+              </a:rPr>
+              <a:t>つみより深いあわれみ</a:t>
+            </a:r>
+          </a:p>
+        </p:txBody>
+      </p:sp>
+      <p:sp>
+        <p:nvSpPr>
+          <p:cNvPr id="5" name="TextBox 4"/>
+          <p:cNvSpPr txBox="1"/>
+          <p:nvPr/>
+        </p:nvSpPr>
+        <p:spPr>
+          <a:xfrm>
+            <a:off x="640080" y="3753612"/>
+            <a:ext cx="10911535" cy="365760"/>
+          </a:xfrm>
+          <a:prstGeom prst="rect">
+            <a:avLst/>
+          </a:prstGeom>
+          <a:noFill/>
+        </p:spPr>
+        <p:txBody>
+          <a:bodyPr wrap="square">
+            <a:spAutoFit/>
+          </a:bodyPr>
+          <a:lstStyle/>
+          <a:p>
+            <a:pPr algn="ctr"/>
+            <a:r>
+              <a:rPr sz="2400" b="0" i="1">
+                <a:solidFill>
+                  <a:srgbClr val="AAAAAA"/>
+                </a:solidFill>
+                <a:latin typeface="Arial"/>
+              </a:rPr>
+              <a:t>tsumi    yori fukai awaremi</a:t>
+            </a:r>
+          </a:p>
+        </p:txBody>
+      </p:sp>
+      <p:sp>
+        <p:nvSpPr>
+          <p:cNvPr id="6" name="TextBox 5"/>
+          <p:cNvSpPr txBox="1"/>
+          <p:nvPr/>
+        </p:nvSpPr>
+        <p:spPr>
+          <a:xfrm>
+            <a:off x="640080" y="4530852"/>
+            <a:ext cx="10911535" cy="310896"/>
           </a:xfrm>
           <a:prstGeom prst="rect">
             <a:avLst/>
@@ -3951,7 +3916,7 @@
             <a:r>
               <a:rPr sz="2000" b="0" i="1">
                 <a:solidFill>
-                  <a:srgbClr val="8C8C8C"/>
+                  <a:srgbClr val="828282"/>
                 </a:solidFill>
                 <a:latin typeface="Arial"/>
               </a:rPr>
@@ -3962,84 +3927,14 @@
       </p:sp>
       <p:sp>
         <p:nvSpPr>
-          <p:cNvPr id="5" name="TextBox 4"/>
-          <p:cNvSpPr txBox="1"/>
-          <p:nvPr/>
-        </p:nvSpPr>
-        <p:spPr>
-          <a:xfrm>
-            <a:off x="594360" y="3529584"/>
-            <a:ext cx="11002975" cy="685800"/>
-          </a:xfrm>
-          <a:prstGeom prst="rect">
-            <a:avLst/>
-          </a:prstGeom>
-          <a:noFill/>
-        </p:spPr>
-        <p:txBody>
-          <a:bodyPr wrap="square">
-            <a:spAutoFit/>
-          </a:bodyPr>
-          <a:lstStyle/>
-          <a:p>
-            <a:pPr algn="ctr"/>
-            <a:r>
-              <a:rPr sz="4400" b="1" i="0">
-                <a:solidFill>
-                  <a:srgbClr val="FFFFFF"/>
-                </a:solidFill>
-                <a:latin typeface="Arial"/>
-              </a:rPr>
-              <a:t>つみより深いあわれみ</a:t>
-            </a:r>
-          </a:p>
-        </p:txBody>
-      </p:sp>
-      <p:sp>
-        <p:nvSpPr>
-          <p:cNvPr id="6" name="TextBox 5"/>
-          <p:cNvSpPr txBox="1"/>
-          <p:nvPr/>
-        </p:nvSpPr>
-        <p:spPr>
-          <a:xfrm>
-            <a:off x="594360" y="4251960"/>
-            <a:ext cx="11002975" cy="384048"/>
-          </a:xfrm>
-          <a:prstGeom prst="rect">
-            <a:avLst/>
-          </a:prstGeom>
-          <a:noFill/>
-        </p:spPr>
-        <p:txBody>
-          <a:bodyPr wrap="square">
-            <a:spAutoFit/>
-          </a:bodyPr>
-          <a:lstStyle/>
-          <a:p>
-            <a:pPr algn="ctr"/>
-            <a:r>
-              <a:rPr sz="2400" b="0" i="1">
-                <a:solidFill>
-                  <a:srgbClr val="B4B4B4"/>
-                </a:solidFill>
-                <a:latin typeface="Arial"/>
-              </a:rPr>
-              <a:t>tsumi    yori fukai awaremi</a:t>
-            </a:r>
-          </a:p>
-        </p:txBody>
-      </p:sp>
-      <p:sp>
-        <p:nvSpPr>
           <p:cNvPr id="7" name="TextBox 6"/>
           <p:cNvSpPr txBox="1"/>
           <p:nvPr/>
         </p:nvSpPr>
         <p:spPr>
           <a:xfrm>
-            <a:off x="594360" y="4672584"/>
-            <a:ext cx="11002975" cy="347472"/>
+            <a:off x="640080" y="4896612"/>
+            <a:ext cx="10911535" cy="310896"/>
           </a:xfrm>
           <a:prstGeom prst="rect">
             <a:avLst/>
@@ -4056,7 +3951,7 @@
             <a:r>
               <a:rPr sz="2000" b="0" i="1">
                 <a:solidFill>
-                  <a:srgbClr val="8C8C8C"/>
+                  <a:srgbClr val="828282"/>
                 </a:solidFill>
                 <a:latin typeface="Arial"/>
               </a:rPr>
@@ -4099,23 +3994,23 @@
         </p:nvSpPr>
         <p:spPr>
           <a:xfrm>
-            <a:off x="594360" y="1837944"/>
-            <a:ext cx="11002975" cy="685800"/>
-          </a:xfrm>
-          <a:prstGeom prst="rect">
-            <a:avLst/>
-          </a:prstGeom>
-          <a:noFill/>
-        </p:spPr>
-        <p:txBody>
-          <a:bodyPr wrap="square">
-            <a:spAutoFit/>
-          </a:bodyPr>
-          <a:lstStyle/>
-          <a:p>
-            <a:pPr algn="ctr"/>
-            <a:r>
-              <a:rPr sz="4400" b="1" i="0">
+            <a:off x="640080" y="1650492"/>
+            <a:ext cx="10911535" cy="731520"/>
+          </a:xfrm>
+          <a:prstGeom prst="rect">
+            <a:avLst/>
+          </a:prstGeom>
+          <a:noFill/>
+        </p:spPr>
+        <p:txBody>
+          <a:bodyPr wrap="square">
+            <a:spAutoFit/>
+          </a:bodyPr>
+          <a:lstStyle/>
+          <a:p>
+            <a:pPr algn="ctr"/>
+            <a:r>
+              <a:rPr sz="4800" b="1" i="0">
                 <a:solidFill>
                   <a:srgbClr val="FFFFFF"/>
                 </a:solidFill>
@@ -4134,8 +4029,8 @@
         </p:nvSpPr>
         <p:spPr>
           <a:xfrm>
-            <a:off x="594360" y="2560320"/>
-            <a:ext cx="11002975" cy="384048"/>
+            <a:off x="640080" y="2418588"/>
+            <a:ext cx="10911535" cy="365760"/>
           </a:xfrm>
           <a:prstGeom prst="rect">
             <a:avLst/>
@@ -4152,7 +4047,7 @@
             <a:r>
               <a:rPr sz="2400" b="0" i="1">
                 <a:solidFill>
-                  <a:srgbClr val="B4B4B4"/>
+                  <a:srgbClr val="AAAAAA"/>
                 </a:solidFill>
                 <a:latin typeface="Arial"/>
               </a:rPr>
@@ -4169,8 +4064,78 @@
         </p:nvSpPr>
         <p:spPr>
           <a:xfrm>
-            <a:off x="594360" y="2980944"/>
-            <a:ext cx="11002975" cy="347472"/>
+            <a:off x="640080" y="2985516"/>
+            <a:ext cx="10911535" cy="731520"/>
+          </a:xfrm>
+          <a:prstGeom prst="rect">
+            <a:avLst/>
+          </a:prstGeom>
+          <a:noFill/>
+        </p:spPr>
+        <p:txBody>
+          <a:bodyPr wrap="square">
+            <a:spAutoFit/>
+          </a:bodyPr>
+          <a:lstStyle/>
+          <a:p>
+            <a:pPr algn="ctr"/>
+            <a:r>
+              <a:rPr sz="4800" b="1" i="0">
+                <a:solidFill>
+                  <a:srgbClr val="FFFFFF"/>
+                </a:solidFill>
+                <a:latin typeface="Arial"/>
+              </a:rPr>
+              <a:t>あさ-ご-とにあた-らしい</a:t>
+            </a:r>
+          </a:p>
+        </p:txBody>
+      </p:sp>
+      <p:sp>
+        <p:nvSpPr>
+          <p:cNvPr id="5" name="TextBox 4"/>
+          <p:cNvSpPr txBox="1"/>
+          <p:nvPr/>
+        </p:nvSpPr>
+        <p:spPr>
+          <a:xfrm>
+            <a:off x="640080" y="3753612"/>
+            <a:ext cx="10911535" cy="365760"/>
+          </a:xfrm>
+          <a:prstGeom prst="rect">
+            <a:avLst/>
+          </a:prstGeom>
+          <a:noFill/>
+        </p:spPr>
+        <p:txBody>
+          <a:bodyPr wrap="square">
+            <a:spAutoFit/>
+          </a:bodyPr>
+          <a:lstStyle/>
+          <a:p>
+            <a:pPr algn="ctr"/>
+            <a:r>
+              <a:rPr sz="2400" b="0" i="1">
+                <a:solidFill>
+                  <a:srgbClr val="AAAAAA"/>
+                </a:solidFill>
+                <a:latin typeface="Arial"/>
+              </a:rPr>
+              <a:t>asa--go--tonia ta-rashii</a:t>
+            </a:r>
+          </a:p>
+        </p:txBody>
+      </p:sp>
+      <p:sp>
+        <p:nvSpPr>
+          <p:cNvPr id="6" name="TextBox 5"/>
+          <p:cNvSpPr txBox="1"/>
+          <p:nvPr/>
+        </p:nvSpPr>
+        <p:spPr>
+          <a:xfrm>
+            <a:off x="640080" y="4530852"/>
+            <a:ext cx="10911535" cy="310896"/>
           </a:xfrm>
           <a:prstGeom prst="rect">
             <a:avLst/>
@@ -4187,7 +4152,7 @@
             <a:r>
               <a:rPr sz="2000" b="0" i="1">
                 <a:solidFill>
-                  <a:srgbClr val="8C8C8C"/>
+                  <a:srgbClr val="828282"/>
                 </a:solidFill>
                 <a:latin typeface="Arial"/>
               </a:rPr>
@@ -4198,84 +4163,14 @@
       </p:sp>
       <p:sp>
         <p:nvSpPr>
-          <p:cNvPr id="5" name="TextBox 4"/>
-          <p:cNvSpPr txBox="1"/>
-          <p:nvPr/>
-        </p:nvSpPr>
-        <p:spPr>
-          <a:xfrm>
-            <a:off x="594360" y="3529584"/>
-            <a:ext cx="11002975" cy="685800"/>
-          </a:xfrm>
-          <a:prstGeom prst="rect">
-            <a:avLst/>
-          </a:prstGeom>
-          <a:noFill/>
-        </p:spPr>
-        <p:txBody>
-          <a:bodyPr wrap="square">
-            <a:spAutoFit/>
-          </a:bodyPr>
-          <a:lstStyle/>
-          <a:p>
-            <a:pPr algn="ctr"/>
-            <a:r>
-              <a:rPr sz="4400" b="1" i="0">
-                <a:solidFill>
-                  <a:srgbClr val="FFFFFF"/>
-                </a:solidFill>
-                <a:latin typeface="Arial"/>
-              </a:rPr>
-              <a:t>あさ-ご-とにあた-らしい</a:t>
-            </a:r>
-          </a:p>
-        </p:txBody>
-      </p:sp>
-      <p:sp>
-        <p:nvSpPr>
-          <p:cNvPr id="6" name="TextBox 5"/>
-          <p:cNvSpPr txBox="1"/>
-          <p:nvPr/>
-        </p:nvSpPr>
-        <p:spPr>
-          <a:xfrm>
-            <a:off x="594360" y="4251960"/>
-            <a:ext cx="11002975" cy="384048"/>
-          </a:xfrm>
-          <a:prstGeom prst="rect">
-            <a:avLst/>
-          </a:prstGeom>
-          <a:noFill/>
-        </p:spPr>
-        <p:txBody>
-          <a:bodyPr wrap="square">
-            <a:spAutoFit/>
-          </a:bodyPr>
-          <a:lstStyle/>
-          <a:p>
-            <a:pPr algn="ctr"/>
-            <a:r>
-              <a:rPr sz="2400" b="0" i="1">
-                <a:solidFill>
-                  <a:srgbClr val="B4B4B4"/>
-                </a:solidFill>
-                <a:latin typeface="Arial"/>
-              </a:rPr>
-              <a:t>asa--go--tonia ta-rashii</a:t>
-            </a:r>
-          </a:p>
-        </p:txBody>
-      </p:sp>
-      <p:sp>
-        <p:nvSpPr>
           <p:cNvPr id="7" name="TextBox 6"/>
           <p:cNvSpPr txBox="1"/>
           <p:nvPr/>
         </p:nvSpPr>
         <p:spPr>
           <a:xfrm>
-            <a:off x="594360" y="4672584"/>
-            <a:ext cx="11002975" cy="347472"/>
+            <a:off x="640080" y="4896612"/>
+            <a:ext cx="10911535" cy="310896"/>
           </a:xfrm>
           <a:prstGeom prst="rect">
             <a:avLst/>
@@ -4292,7 +4187,7 @@
             <a:r>
               <a:rPr sz="2000" b="0" i="1">
                 <a:solidFill>
-                  <a:srgbClr val="8C8C8C"/>
+                  <a:srgbClr val="828282"/>
                 </a:solidFill>
                 <a:latin typeface="Arial"/>
               </a:rPr>
@@ -4335,23 +4230,23 @@
         </p:nvSpPr>
         <p:spPr>
           <a:xfrm>
-            <a:off x="594360" y="2683764"/>
-            <a:ext cx="11002975" cy="685800"/>
-          </a:xfrm>
-          <a:prstGeom prst="rect">
-            <a:avLst/>
-          </a:prstGeom>
-          <a:noFill/>
-        </p:spPr>
-        <p:txBody>
-          <a:bodyPr wrap="square">
-            <a:spAutoFit/>
-          </a:bodyPr>
-          <a:lstStyle/>
-          <a:p>
-            <a:pPr algn="ctr"/>
-            <a:r>
-              <a:rPr sz="4400" b="1" i="0">
+            <a:off x="640080" y="2500884"/>
+            <a:ext cx="10911535" cy="731520"/>
+          </a:xfrm>
+          <a:prstGeom prst="rect">
+            <a:avLst/>
+          </a:prstGeom>
+          <a:noFill/>
+        </p:spPr>
+        <p:txBody>
+          <a:bodyPr wrap="square">
+            <a:spAutoFit/>
+          </a:bodyPr>
+          <a:lstStyle/>
+          <a:p>
+            <a:pPr algn="ctr"/>
+            <a:r>
+              <a:rPr sz="4800" b="1" i="0">
                 <a:solidFill>
                   <a:srgbClr val="FFFFFF"/>
                 </a:solidFill>
@@ -4370,8 +4265,8 @@
         </p:nvSpPr>
         <p:spPr>
           <a:xfrm>
-            <a:off x="594360" y="3406140"/>
-            <a:ext cx="11002975" cy="384048"/>
+            <a:off x="640080" y="3268980"/>
+            <a:ext cx="10911535" cy="365760"/>
           </a:xfrm>
           <a:prstGeom prst="rect">
             <a:avLst/>
@@ -4388,7 +4283,7 @@
             <a:r>
               <a:rPr sz="2400" b="0" i="1">
                 <a:solidFill>
-                  <a:srgbClr val="B4B4B4"/>
+                  <a:srgbClr val="AAAAAA"/>
                 </a:solidFill>
                 <a:latin typeface="Arial"/>
               </a:rPr>
@@ -4405,8 +4300,8 @@
         </p:nvSpPr>
         <p:spPr>
           <a:xfrm>
-            <a:off x="594360" y="3826764"/>
-            <a:ext cx="11002975" cy="347472"/>
+            <a:off x="640080" y="4046220"/>
+            <a:ext cx="10911535" cy="310896"/>
           </a:xfrm>
           <a:prstGeom prst="rect">
             <a:avLst/>
@@ -4423,7 +4318,7 @@
             <a:r>
               <a:rPr sz="2000" b="0" i="1">
                 <a:solidFill>
-                  <a:srgbClr val="8C8C8C"/>
+                  <a:srgbClr val="828282"/>
                 </a:solidFill>
                 <a:latin typeface="Arial"/>
               </a:rPr>
@@ -4466,23 +4361,23 @@
         </p:nvSpPr>
         <p:spPr>
           <a:xfrm>
-            <a:off x="594360" y="2258568"/>
-            <a:ext cx="11002975" cy="685800"/>
-          </a:xfrm>
-          <a:prstGeom prst="rect">
-            <a:avLst/>
-          </a:prstGeom>
-          <a:noFill/>
-        </p:spPr>
-        <p:txBody>
-          <a:bodyPr wrap="square">
-            <a:spAutoFit/>
-          </a:bodyPr>
-          <a:lstStyle/>
-          <a:p>
-            <a:pPr algn="ctr"/>
-            <a:r>
-              <a:rPr sz="4400" b="1" i="0">
+            <a:off x="640080" y="2052828"/>
+            <a:ext cx="10911535" cy="731520"/>
+          </a:xfrm>
+          <a:prstGeom prst="rect">
+            <a:avLst/>
+          </a:prstGeom>
+          <a:noFill/>
+        </p:spPr>
+        <p:txBody>
+          <a:bodyPr wrap="square">
+            <a:spAutoFit/>
+          </a:bodyPr>
+          <a:lstStyle/>
+          <a:p>
+            <a:pPr algn="ctr"/>
+            <a:r>
+              <a:rPr sz="4800" b="1" i="0">
                 <a:solidFill>
                   <a:srgbClr val="FFFFFF"/>
                 </a:solidFill>
@@ -4501,25 +4396,60 @@
         </p:nvSpPr>
         <p:spPr>
           <a:xfrm>
-            <a:off x="594360" y="2980944"/>
-            <a:ext cx="11002975" cy="347472"/>
-          </a:xfrm>
-          <a:prstGeom prst="rect">
-            <a:avLst/>
-          </a:prstGeom>
-          <a:noFill/>
-        </p:spPr>
-        <p:txBody>
-          <a:bodyPr wrap="square">
-            <a:spAutoFit/>
-          </a:bodyPr>
-          <a:lstStyle/>
-          <a:p>
-            <a:pPr algn="ctr"/>
-            <a:r>
-              <a:rPr sz="2200" b="0" i="1">
-                <a:solidFill>
-                  <a:srgbClr val="8C8C8C"/>
+            <a:off x="640080" y="2985516"/>
+            <a:ext cx="10911535" cy="731520"/>
+          </a:xfrm>
+          <a:prstGeom prst="rect">
+            <a:avLst/>
+          </a:prstGeom>
+          <a:noFill/>
+        </p:spPr>
+        <p:txBody>
+          <a:bodyPr wrap="square">
+            <a:spAutoFit/>
+          </a:bodyPr>
+          <a:lstStyle/>
+          <a:p>
+            <a:pPr algn="ctr"/>
+            <a:r>
+              <a:rPr sz="4600" b="1" i="0">
+                <a:solidFill>
+                  <a:srgbClr val="FFFFFF"/>
+                </a:solidFill>
+                <a:latin typeface="Arial"/>
+              </a:rPr>
+              <a:t>Sua misericórdia dura para sempre</a:t>
+            </a:r>
+          </a:p>
+        </p:txBody>
+      </p:sp>
+      <p:sp>
+        <p:nvSpPr>
+          <p:cNvPr id="4" name="TextBox 3"/>
+          <p:cNvSpPr txBox="1"/>
+          <p:nvPr/>
+        </p:nvSpPr>
+        <p:spPr>
+          <a:xfrm>
+            <a:off x="640080" y="4128516"/>
+            <a:ext cx="10911535" cy="310896"/>
+          </a:xfrm>
+          <a:prstGeom prst="rect">
+            <a:avLst/>
+          </a:prstGeom>
+          <a:noFill/>
+        </p:spPr>
+        <p:txBody>
+          <a:bodyPr wrap="square">
+            <a:spAutoFit/>
+          </a:bodyPr>
+          <a:lstStyle/>
+          <a:p>
+            <a:pPr algn="ctr"/>
+            <a:r>
+              <a:rPr sz="2000" b="0" i="0">
+                <a:solidFill>
+                  <a:srgbClr val="828282"/>
                 </a:solidFill>
                 <a:latin typeface="Arial"/>
               </a:rPr>
@@ -4530,66 +4460,31 @@
       </p:sp>
       <p:sp>
         <p:nvSpPr>
-          <p:cNvPr id="4" name="TextBox 3"/>
-          <p:cNvSpPr txBox="1"/>
-          <p:nvPr/>
-        </p:nvSpPr>
-        <p:spPr>
-          <a:xfrm>
-            <a:off x="594360" y="3529584"/>
-            <a:ext cx="11002975" cy="685800"/>
-          </a:xfrm>
-          <a:prstGeom prst="rect">
-            <a:avLst/>
-          </a:prstGeom>
-          <a:noFill/>
-        </p:spPr>
-        <p:txBody>
-          <a:bodyPr wrap="square">
-            <a:spAutoFit/>
-          </a:bodyPr>
-          <a:lstStyle/>
-          <a:p>
-            <a:pPr algn="ctr"/>
-            <a:r>
-              <a:rPr sz="4266" b="1" i="0">
-                <a:solidFill>
-                  <a:srgbClr val="FFFFFF"/>
-                </a:solidFill>
-                <a:latin typeface="Arial"/>
-              </a:rPr>
-              <a:t>Sua misericórdia dura para sempre</a:t>
-            </a:r>
-          </a:p>
-        </p:txBody>
-      </p:sp>
-      <p:sp>
-        <p:nvSpPr>
           <p:cNvPr id="5" name="TextBox 4"/>
           <p:cNvSpPr txBox="1"/>
           <p:nvPr/>
         </p:nvSpPr>
         <p:spPr>
           <a:xfrm>
-            <a:off x="594360" y="4251960"/>
-            <a:ext cx="11002975" cy="347472"/>
-          </a:xfrm>
-          <a:prstGeom prst="rect">
-            <a:avLst/>
-          </a:prstGeom>
-          <a:noFill/>
-        </p:spPr>
-        <p:txBody>
-          <a:bodyPr wrap="square">
-            <a:spAutoFit/>
-          </a:bodyPr>
-          <a:lstStyle/>
-          <a:p>
-            <a:pPr algn="ctr"/>
-            <a:r>
-              <a:rPr sz="2200" b="0" i="1">
-                <a:solidFill>
-                  <a:srgbClr val="8C8C8C"/>
+            <a:off x="640080" y="4494276"/>
+            <a:ext cx="10911535" cy="310896"/>
+          </a:xfrm>
+          <a:prstGeom prst="rect">
+            <a:avLst/>
+          </a:prstGeom>
+          <a:noFill/>
+        </p:spPr>
+        <p:txBody>
+          <a:bodyPr wrap="square">
+            <a:spAutoFit/>
+          </a:bodyPr>
+          <a:lstStyle/>
+          <a:p>
+            <a:pPr algn="ctr"/>
+            <a:r>
+              <a:rPr sz="2000" b="0" i="0">
+                <a:solidFill>
+                  <a:srgbClr val="828282"/>
                 </a:solidFill>
                 <a:latin typeface="Arial"/>
               </a:rPr>
@@ -4632,23 +4527,23 @@
         </p:nvSpPr>
         <p:spPr>
           <a:xfrm>
-            <a:off x="594360" y="2258568"/>
-            <a:ext cx="11002975" cy="685800"/>
-          </a:xfrm>
-          <a:prstGeom prst="rect">
-            <a:avLst/>
-          </a:prstGeom>
-          <a:noFill/>
-        </p:spPr>
-        <p:txBody>
-          <a:bodyPr wrap="square">
-            <a:spAutoFit/>
-          </a:bodyPr>
-          <a:lstStyle/>
-          <a:p>
-            <a:pPr algn="ctr"/>
-            <a:r>
-              <a:rPr sz="4400" b="1" i="0">
+            <a:off x="640080" y="2052828"/>
+            <a:ext cx="10911535" cy="731520"/>
+          </a:xfrm>
+          <a:prstGeom prst="rect">
+            <a:avLst/>
+          </a:prstGeom>
+          <a:noFill/>
+        </p:spPr>
+        <p:txBody>
+          <a:bodyPr wrap="square">
+            <a:spAutoFit/>
+          </a:bodyPr>
+          <a:lstStyle/>
+          <a:p>
+            <a:pPr algn="ctr"/>
+            <a:r>
+              <a:rPr sz="4800" b="1" i="0">
                 <a:solidFill>
                   <a:srgbClr val="FFFFFF"/>
                 </a:solidFill>
@@ -4667,25 +4562,60 @@
         </p:nvSpPr>
         <p:spPr>
           <a:xfrm>
-            <a:off x="594360" y="2980944"/>
-            <a:ext cx="11002975" cy="347472"/>
-          </a:xfrm>
-          <a:prstGeom prst="rect">
-            <a:avLst/>
-          </a:prstGeom>
-          <a:noFill/>
-        </p:spPr>
-        <p:txBody>
-          <a:bodyPr wrap="square">
-            <a:spAutoFit/>
-          </a:bodyPr>
-          <a:lstStyle/>
-          <a:p>
-            <a:pPr algn="ctr"/>
-            <a:r>
-              <a:rPr sz="2200" b="0" i="1">
-                <a:solidFill>
-                  <a:srgbClr val="8C8C8C"/>
+            <a:off x="640080" y="2985516"/>
+            <a:ext cx="10911535" cy="731520"/>
+          </a:xfrm>
+          <a:prstGeom prst="rect">
+            <a:avLst/>
+          </a:prstGeom>
+          <a:noFill/>
+        </p:spPr>
+        <p:txBody>
+          <a:bodyPr wrap="square">
+            <a:spAutoFit/>
+          </a:bodyPr>
+          <a:lstStyle/>
+          <a:p>
+            <a:pPr algn="ctr"/>
+            <a:r>
+              <a:rPr sz="4600" b="1" i="0">
+                <a:solidFill>
+                  <a:srgbClr val="FFFFFF"/>
+                </a:solidFill>
+                <a:latin typeface="Arial"/>
+              </a:rPr>
+              <a:t>Sua misericórdia dura para sempre</a:t>
+            </a:r>
+          </a:p>
+        </p:txBody>
+      </p:sp>
+      <p:sp>
+        <p:nvSpPr>
+          <p:cNvPr id="4" name="TextBox 3"/>
+          <p:cNvSpPr txBox="1"/>
+          <p:nvPr/>
+        </p:nvSpPr>
+        <p:spPr>
+          <a:xfrm>
+            <a:off x="640080" y="4128516"/>
+            <a:ext cx="10911535" cy="310896"/>
+          </a:xfrm>
+          <a:prstGeom prst="rect">
+            <a:avLst/>
+          </a:prstGeom>
+          <a:noFill/>
+        </p:spPr>
+        <p:txBody>
+          <a:bodyPr wrap="square">
+            <a:spAutoFit/>
+          </a:bodyPr>
+          <a:lstStyle/>
+          <a:p>
+            <a:pPr algn="ctr"/>
+            <a:r>
+              <a:rPr sz="2000" b="0" i="0">
+                <a:solidFill>
+                  <a:srgbClr val="828282"/>
                 </a:solidFill>
                 <a:latin typeface="Arial"/>
               </a:rPr>
@@ -4696,66 +4626,31 @@
       </p:sp>
       <p:sp>
         <p:nvSpPr>
-          <p:cNvPr id="4" name="TextBox 3"/>
-          <p:cNvSpPr txBox="1"/>
-          <p:nvPr/>
-        </p:nvSpPr>
-        <p:spPr>
-          <a:xfrm>
-            <a:off x="594360" y="3529584"/>
-            <a:ext cx="11002975" cy="685800"/>
-          </a:xfrm>
-          <a:prstGeom prst="rect">
-            <a:avLst/>
-          </a:prstGeom>
-          <a:noFill/>
-        </p:spPr>
-        <p:txBody>
-          <a:bodyPr wrap="square">
-            <a:spAutoFit/>
-          </a:bodyPr>
-          <a:lstStyle/>
-          <a:p>
-            <a:pPr algn="ctr"/>
-            <a:r>
-              <a:rPr sz="4266" b="1" i="0">
-                <a:solidFill>
-                  <a:srgbClr val="FFFFFF"/>
-                </a:solidFill>
-                <a:latin typeface="Arial"/>
-              </a:rPr>
-              <a:t>Sua misericórdia dura para sempre</a:t>
-            </a:r>
-          </a:p>
-        </p:txBody>
-      </p:sp>
-      <p:sp>
-        <p:nvSpPr>
           <p:cNvPr id="5" name="TextBox 4"/>
           <p:cNvSpPr txBox="1"/>
           <p:nvPr/>
         </p:nvSpPr>
         <p:spPr>
           <a:xfrm>
-            <a:off x="594360" y="4251960"/>
-            <a:ext cx="11002975" cy="347472"/>
-          </a:xfrm>
-          <a:prstGeom prst="rect">
-            <a:avLst/>
-          </a:prstGeom>
-          <a:noFill/>
-        </p:spPr>
-        <p:txBody>
-          <a:bodyPr wrap="square">
-            <a:spAutoFit/>
-          </a:bodyPr>
-          <a:lstStyle/>
-          <a:p>
-            <a:pPr algn="ctr"/>
-            <a:r>
-              <a:rPr sz="2200" b="0" i="1">
-                <a:solidFill>
-                  <a:srgbClr val="8C8C8C"/>
+            <a:off x="640080" y="4494276"/>
+            <a:ext cx="10911535" cy="310896"/>
+          </a:xfrm>
+          <a:prstGeom prst="rect">
+            <a:avLst/>
+          </a:prstGeom>
+          <a:noFill/>
+        </p:spPr>
+        <p:txBody>
+          <a:bodyPr wrap="square">
+            <a:spAutoFit/>
+          </a:bodyPr>
+          <a:lstStyle/>
+          <a:p>
+            <a:pPr algn="ctr"/>
+            <a:r>
+              <a:rPr sz="2000" b="0" i="0">
+                <a:solidFill>
+                  <a:srgbClr val="828282"/>
                 </a:solidFill>
                 <a:latin typeface="Arial"/>
               </a:rPr>
@@ -4798,64 +4693,29 @@
         </p:nvSpPr>
         <p:spPr>
           <a:xfrm>
-            <a:off x="594360" y="2894076"/>
-            <a:ext cx="11002975" cy="685800"/>
-          </a:xfrm>
-          <a:prstGeom prst="rect">
-            <a:avLst/>
-          </a:prstGeom>
-          <a:noFill/>
-        </p:spPr>
-        <p:txBody>
-          <a:bodyPr wrap="square">
-            <a:spAutoFit/>
-          </a:bodyPr>
-          <a:lstStyle/>
-          <a:p>
-            <a:pPr algn="ctr"/>
-            <a:r>
-              <a:rPr sz="4400" b="1" i="0">
+            <a:off x="640080" y="2702052"/>
+            <a:ext cx="10911535" cy="731520"/>
+          </a:xfrm>
+          <a:prstGeom prst="rect">
+            <a:avLst/>
+          </a:prstGeom>
+          <a:noFill/>
+        </p:spPr>
+        <p:txBody>
+          <a:bodyPr wrap="square">
+            <a:spAutoFit/>
+          </a:bodyPr>
+          <a:lstStyle/>
+          <a:p>
+            <a:pPr algn="ctr"/>
+            <a:r>
+              <a:rPr sz="4800" b="1" i="0">
                 <a:solidFill>
                   <a:srgbClr val="FFFFFF"/>
                 </a:solidFill>
                 <a:latin typeface="Arial"/>
               </a:rPr>
               <a:t>Nossos pecados são muitos</a:t>
-            </a:r>
-          </a:p>
-        </p:txBody>
-      </p:sp>
-      <p:sp>
-        <p:nvSpPr>
-          <p:cNvPr id="3" name="TextBox 2"/>
-          <p:cNvSpPr txBox="1"/>
-          <p:nvPr/>
-        </p:nvSpPr>
-        <p:spPr>
-          <a:xfrm>
-            <a:off x="594360" y="3616452"/>
-            <a:ext cx="11002975" cy="347472"/>
-          </a:xfrm>
-          <a:prstGeom prst="rect">
-            <a:avLst/>
-          </a:prstGeom>
-          <a:noFill/>
-        </p:spPr>
-        <p:txBody>
-          <a:bodyPr wrap="square">
-            <a:spAutoFit/>
-          </a:bodyPr>
-          <a:lstStyle/>
-          <a:p>
-            <a:pPr algn="ctr"/>
-            <a:r>
-              <a:rPr sz="2200" b="0" i="1">
-                <a:solidFill>
-                  <a:srgbClr val="8C8C8C"/>
-                </a:solidFill>
-                <a:latin typeface="Arial"/>
-              </a:rPr>
-              <a:t/>
             </a:r>
           </a:p>
         </p:txBody>
@@ -4894,23 +4754,23 @@
         </p:nvSpPr>
         <p:spPr>
           <a:xfrm>
-            <a:off x="594360" y="1837944"/>
-            <a:ext cx="11002975" cy="685800"/>
-          </a:xfrm>
-          <a:prstGeom prst="rect">
-            <a:avLst/>
-          </a:prstGeom>
-          <a:noFill/>
-        </p:spPr>
-        <p:txBody>
-          <a:bodyPr wrap="square">
-            <a:spAutoFit/>
-          </a:bodyPr>
-          <a:lstStyle/>
-          <a:p>
-            <a:pPr algn="ctr"/>
-            <a:r>
-              <a:rPr sz="4400" b="1" i="0">
+            <a:off x="640080" y="1650492"/>
+            <a:ext cx="10911535" cy="731520"/>
+          </a:xfrm>
+          <a:prstGeom prst="rect">
+            <a:avLst/>
+          </a:prstGeom>
+          <a:noFill/>
+        </p:spPr>
+        <p:txBody>
+          <a:bodyPr wrap="square">
+            <a:spAutoFit/>
+          </a:bodyPr>
+          <a:lstStyle/>
+          <a:p>
+            <a:pPr algn="ctr"/>
+            <a:r>
+              <a:rPr sz="4800" b="1" i="0">
                 <a:solidFill>
                   <a:srgbClr val="FFFFFF"/>
                 </a:solidFill>
@@ -4929,8 +4789,8 @@
         </p:nvSpPr>
         <p:spPr>
           <a:xfrm>
-            <a:off x="594360" y="2560320"/>
-            <a:ext cx="11002975" cy="384048"/>
+            <a:off x="640080" y="2418588"/>
+            <a:ext cx="10911535" cy="365760"/>
           </a:xfrm>
           <a:prstGeom prst="rect">
             <a:avLst/>
@@ -4947,7 +4807,7 @@
             <a:r>
               <a:rPr sz="2400" b="0" i="1">
                 <a:solidFill>
-                  <a:srgbClr val="B4B4B4"/>
+                  <a:srgbClr val="AAAAAA"/>
                 </a:solidFill>
                 <a:latin typeface="Arial"/>
               </a:rPr>
@@ -4964,8 +4824,78 @@
         </p:nvSpPr>
         <p:spPr>
           <a:xfrm>
-            <a:off x="594360" y="2980944"/>
-            <a:ext cx="11002975" cy="347472"/>
+            <a:off x="640080" y="2985516"/>
+            <a:ext cx="10911535" cy="731520"/>
+          </a:xfrm>
+          <a:prstGeom prst="rect">
+            <a:avLst/>
+          </a:prstGeom>
+          <a:noFill/>
+        </p:spPr>
+        <p:txBody>
+          <a:bodyPr wrap="square">
+            <a:spAutoFit/>
+          </a:bodyPr>
+          <a:lstStyle/>
+          <a:p>
+            <a:pPr algn="ctr"/>
+            <a:r>
+              <a:rPr sz="4800" b="1" i="0">
+                <a:solidFill>
+                  <a:srgbClr val="FFFFFF"/>
+                </a:solidFill>
+                <a:latin typeface="Arial"/>
+              </a:rPr>
+              <a:t>いのちを捨てだいかの血</a:t>
+            </a:r>
+          </a:p>
+        </p:txBody>
+      </p:sp>
+      <p:sp>
+        <p:nvSpPr>
+          <p:cNvPr id="5" name="TextBox 4"/>
+          <p:cNvSpPr txBox="1"/>
+          <p:nvPr/>
+        </p:nvSpPr>
+        <p:spPr>
+          <a:xfrm>
+            <a:off x="640080" y="3753612"/>
+            <a:ext cx="10911535" cy="365760"/>
+          </a:xfrm>
+          <a:prstGeom prst="rect">
+            <a:avLst/>
+          </a:prstGeom>
+          <a:noFill/>
+        </p:spPr>
+        <p:txBody>
+          <a:bodyPr wrap="square">
+            <a:spAutoFit/>
+          </a:bodyPr>
+          <a:lstStyle/>
+          <a:p>
+            <a:pPr algn="ctr"/>
+            <a:r>
+              <a:rPr sz="2400" b="0" i="1">
+                <a:solidFill>
+                  <a:srgbClr val="AAAAAA"/>
+                </a:solidFill>
+                <a:latin typeface="Arial"/>
+              </a:rPr>
+              <a:t>i nochio  suteda ikanochi</a:t>
+            </a:r>
+          </a:p>
+        </p:txBody>
+      </p:sp>
+      <p:sp>
+        <p:nvSpPr>
+          <p:cNvPr id="6" name="TextBox 5"/>
+          <p:cNvSpPr txBox="1"/>
+          <p:nvPr/>
+        </p:nvSpPr>
+        <p:spPr>
+          <a:xfrm>
+            <a:off x="640080" y="4530852"/>
+            <a:ext cx="10911535" cy="310896"/>
           </a:xfrm>
           <a:prstGeom prst="rect">
             <a:avLst/>
@@ -4982,7 +4912,7 @@
             <a:r>
               <a:rPr sz="2000" b="0" i="1">
                 <a:solidFill>
-                  <a:srgbClr val="8C8C8C"/>
+                  <a:srgbClr val="828282"/>
                 </a:solidFill>
                 <a:latin typeface="Arial"/>
               </a:rPr>
@@ -4993,84 +4923,14 @@
       </p:sp>
       <p:sp>
         <p:nvSpPr>
-          <p:cNvPr id="5" name="TextBox 4"/>
-          <p:cNvSpPr txBox="1"/>
-          <p:nvPr/>
-        </p:nvSpPr>
-        <p:spPr>
-          <a:xfrm>
-            <a:off x="594360" y="3529584"/>
-            <a:ext cx="11002975" cy="685800"/>
-          </a:xfrm>
-          <a:prstGeom prst="rect">
-            <a:avLst/>
-          </a:prstGeom>
-          <a:noFill/>
-        </p:spPr>
-        <p:txBody>
-          <a:bodyPr wrap="square">
-            <a:spAutoFit/>
-          </a:bodyPr>
-          <a:lstStyle/>
-          <a:p>
-            <a:pPr algn="ctr"/>
-            <a:r>
-              <a:rPr sz="4400" b="1" i="0">
-                <a:solidFill>
-                  <a:srgbClr val="FFFFFF"/>
-                </a:solidFill>
-                <a:latin typeface="Arial"/>
-              </a:rPr>
-              <a:t>いのちを捨てだいかの血</a:t>
-            </a:r>
-          </a:p>
-        </p:txBody>
-      </p:sp>
-      <p:sp>
-        <p:nvSpPr>
-          <p:cNvPr id="6" name="TextBox 5"/>
-          <p:cNvSpPr txBox="1"/>
-          <p:nvPr/>
-        </p:nvSpPr>
-        <p:spPr>
-          <a:xfrm>
-            <a:off x="594360" y="4251960"/>
-            <a:ext cx="11002975" cy="384048"/>
-          </a:xfrm>
-          <a:prstGeom prst="rect">
-            <a:avLst/>
-          </a:prstGeom>
-          <a:noFill/>
-        </p:spPr>
-        <p:txBody>
-          <a:bodyPr wrap="square">
-            <a:spAutoFit/>
-          </a:bodyPr>
-          <a:lstStyle/>
-          <a:p>
-            <a:pPr algn="ctr"/>
-            <a:r>
-              <a:rPr sz="2400" b="0" i="1">
-                <a:solidFill>
-                  <a:srgbClr val="B4B4B4"/>
-                </a:solidFill>
-                <a:latin typeface="Arial"/>
-              </a:rPr>
-              <a:t>i nochio  suteda ikanochi</a:t>
-            </a:r>
-          </a:p>
-        </p:txBody>
-      </p:sp>
-      <p:sp>
-        <p:nvSpPr>
           <p:cNvPr id="7" name="TextBox 6"/>
           <p:cNvSpPr txBox="1"/>
           <p:nvPr/>
         </p:nvSpPr>
         <p:spPr>
           <a:xfrm>
-            <a:off x="594360" y="4672584"/>
-            <a:ext cx="11002975" cy="347472"/>
+            <a:off x="640080" y="4896612"/>
+            <a:ext cx="10911535" cy="310896"/>
           </a:xfrm>
           <a:prstGeom prst="rect">
             <a:avLst/>
@@ -5087,7 +4947,7 @@
             <a:r>
               <a:rPr sz="2000" b="0" i="1">
                 <a:solidFill>
-                  <a:srgbClr val="8C8C8C"/>
+                  <a:srgbClr val="828282"/>
                 </a:solidFill>
                 <a:latin typeface="Arial"/>
               </a:rPr>
@@ -5130,23 +4990,23 @@
         </p:nvSpPr>
         <p:spPr>
           <a:xfrm>
-            <a:off x="594360" y="2258568"/>
-            <a:ext cx="11002975" cy="685800"/>
-          </a:xfrm>
-          <a:prstGeom prst="rect">
-            <a:avLst/>
-          </a:prstGeom>
-          <a:noFill/>
-        </p:spPr>
-        <p:txBody>
-          <a:bodyPr wrap="square">
-            <a:spAutoFit/>
-          </a:bodyPr>
-          <a:lstStyle/>
-          <a:p>
-            <a:pPr algn="ctr"/>
-            <a:r>
-              <a:rPr sz="4400" b="1" i="0">
+            <a:off x="640080" y="2052828"/>
+            <a:ext cx="10911535" cy="731520"/>
+          </a:xfrm>
+          <a:prstGeom prst="rect">
+            <a:avLst/>
+          </a:prstGeom>
+          <a:noFill/>
+        </p:spPr>
+        <p:txBody>
+          <a:bodyPr wrap="square">
+            <a:spAutoFit/>
+          </a:bodyPr>
+          <a:lstStyle/>
+          <a:p>
+            <a:pPr algn="ctr"/>
+            <a:r>
+              <a:rPr sz="4800" b="1" i="0">
                 <a:solidFill>
                   <a:srgbClr val="FFFFFF"/>
                 </a:solidFill>
@@ -5165,25 +5025,60 @@
         </p:nvSpPr>
         <p:spPr>
           <a:xfrm>
-            <a:off x="594360" y="2980944"/>
-            <a:ext cx="11002975" cy="347472"/>
-          </a:xfrm>
-          <a:prstGeom prst="rect">
-            <a:avLst/>
-          </a:prstGeom>
-          <a:noFill/>
-        </p:spPr>
-        <p:txBody>
-          <a:bodyPr wrap="square">
-            <a:spAutoFit/>
-          </a:bodyPr>
-          <a:lstStyle/>
-          <a:p>
-            <a:pPr algn="ctr"/>
-            <a:r>
-              <a:rPr sz="2200" b="0" i="1">
-                <a:solidFill>
-                  <a:srgbClr val="8C8C8C"/>
+            <a:off x="640080" y="2985516"/>
+            <a:ext cx="10911535" cy="731520"/>
+          </a:xfrm>
+          <a:prstGeom prst="rect">
+            <a:avLst/>
+          </a:prstGeom>
+          <a:noFill/>
+        </p:spPr>
+        <p:txBody>
+          <a:bodyPr wrap="square">
+            <a:spAutoFit/>
+          </a:bodyPr>
+          <a:lstStyle/>
+          <a:p>
+            <a:pPr algn="ctr"/>
+            <a:r>
+              <a:rPr sz="4800" b="1" i="0">
+                <a:solidFill>
+                  <a:srgbClr val="FFFFFF"/>
+                </a:solidFill>
+                <a:latin typeface="Arial"/>
+              </a:rPr>
+              <a:t>Toda compreensão</a:t>
+            </a:r>
+          </a:p>
+        </p:txBody>
+      </p:sp>
+      <p:sp>
+        <p:nvSpPr>
+          <p:cNvPr id="4" name="TextBox 3"/>
+          <p:cNvSpPr txBox="1"/>
+          <p:nvPr/>
+        </p:nvSpPr>
+        <p:spPr>
+          <a:xfrm>
+            <a:off x="640080" y="4128516"/>
+            <a:ext cx="10911535" cy="310896"/>
+          </a:xfrm>
+          <a:prstGeom prst="rect">
+            <a:avLst/>
+          </a:prstGeom>
+          <a:noFill/>
+        </p:spPr>
+        <p:txBody>
+          <a:bodyPr wrap="square">
+            <a:spAutoFit/>
+          </a:bodyPr>
+          <a:lstStyle/>
+          <a:p>
+            <a:pPr algn="ctr"/>
+            <a:r>
+              <a:rPr sz="2000" b="0" i="0">
+                <a:solidFill>
+                  <a:srgbClr val="828282"/>
                 </a:solidFill>
                 <a:latin typeface="Arial"/>
               </a:rPr>
@@ -5194,66 +5089,31 @@
       </p:sp>
       <p:sp>
         <p:nvSpPr>
-          <p:cNvPr id="4" name="TextBox 3"/>
-          <p:cNvSpPr txBox="1"/>
-          <p:nvPr/>
-        </p:nvSpPr>
-        <p:spPr>
-          <a:xfrm>
-            <a:off x="594360" y="3529584"/>
-            <a:ext cx="11002975" cy="685800"/>
-          </a:xfrm>
-          <a:prstGeom prst="rect">
-            <a:avLst/>
-          </a:prstGeom>
-          <a:noFill/>
-        </p:spPr>
-        <p:txBody>
-          <a:bodyPr wrap="square">
-            <a:spAutoFit/>
-          </a:bodyPr>
-          <a:lstStyle/>
-          <a:p>
-            <a:pPr algn="ctr"/>
-            <a:r>
-              <a:rPr sz="4400" b="1" i="0">
-                <a:solidFill>
-                  <a:srgbClr val="FFFFFF"/>
-                </a:solidFill>
-                <a:latin typeface="Arial"/>
-              </a:rPr>
-              <a:t>Toda compreensão</a:t>
-            </a:r>
-          </a:p>
-        </p:txBody>
-      </p:sp>
-      <p:sp>
-        <p:nvSpPr>
           <p:cNvPr id="5" name="TextBox 4"/>
           <p:cNvSpPr txBox="1"/>
           <p:nvPr/>
         </p:nvSpPr>
         <p:spPr>
           <a:xfrm>
-            <a:off x="594360" y="4251960"/>
-            <a:ext cx="11002975" cy="347472"/>
-          </a:xfrm>
-          <a:prstGeom prst="rect">
-            <a:avLst/>
-          </a:prstGeom>
-          <a:noFill/>
-        </p:spPr>
-        <p:txBody>
-          <a:bodyPr wrap="square">
-            <a:spAutoFit/>
-          </a:bodyPr>
-          <a:lstStyle/>
-          <a:p>
-            <a:pPr algn="ctr"/>
-            <a:r>
-              <a:rPr sz="2200" b="0" i="1">
-                <a:solidFill>
-                  <a:srgbClr val="8C8C8C"/>
+            <a:off x="640080" y="4494276"/>
+            <a:ext cx="10911535" cy="310896"/>
+          </a:xfrm>
+          <a:prstGeom prst="rect">
+            <a:avLst/>
+          </a:prstGeom>
+          <a:noFill/>
+        </p:spPr>
+        <p:txBody>
+          <a:bodyPr wrap="square">
+            <a:spAutoFit/>
+          </a:bodyPr>
+          <a:lstStyle/>
+          <a:p>
+            <a:pPr algn="ctr"/>
+            <a:r>
+              <a:rPr sz="2000" b="0" i="0">
+                <a:solidFill>
+                  <a:srgbClr val="828282"/>
                 </a:solidFill>
                 <a:latin typeface="Arial"/>
               </a:rPr>
@@ -5296,23 +5156,23 @@
         </p:nvSpPr>
         <p:spPr>
           <a:xfrm>
-            <a:off x="594360" y="1837944"/>
-            <a:ext cx="11002975" cy="685800"/>
-          </a:xfrm>
-          <a:prstGeom prst="rect">
-            <a:avLst/>
-          </a:prstGeom>
-          <a:noFill/>
-        </p:spPr>
-        <p:txBody>
-          <a:bodyPr wrap="square">
-            <a:spAutoFit/>
-          </a:bodyPr>
-          <a:lstStyle/>
-          <a:p>
-            <a:pPr algn="ctr"/>
-            <a:r>
-              <a:rPr sz="4400" b="1" i="0">
+            <a:off x="640080" y="1650492"/>
+            <a:ext cx="10911535" cy="731520"/>
+          </a:xfrm>
+          <a:prstGeom prst="rect">
+            <a:avLst/>
+          </a:prstGeom>
+          <a:noFill/>
+        </p:spPr>
+        <p:txBody>
+          <a:bodyPr wrap="square">
+            <a:spAutoFit/>
+          </a:bodyPr>
+          <a:lstStyle/>
+          <a:p>
+            <a:pPr algn="ctr"/>
+            <a:r>
+              <a:rPr sz="4800" b="1" i="0">
                 <a:solidFill>
                   <a:srgbClr val="FFFFFF"/>
                 </a:solidFill>
@@ -5331,8 +5191,8 @@
         </p:nvSpPr>
         <p:spPr>
           <a:xfrm>
-            <a:off x="594360" y="2560320"/>
-            <a:ext cx="11002975" cy="384048"/>
+            <a:off x="640080" y="2418588"/>
+            <a:ext cx="10911535" cy="365760"/>
           </a:xfrm>
           <a:prstGeom prst="rect">
             <a:avLst/>
@@ -5349,7 +5209,7 @@
             <a:r>
               <a:rPr sz="2400" b="0" i="1">
                 <a:solidFill>
-                  <a:srgbClr val="B4B4B4"/>
+                  <a:srgbClr val="AAAAAA"/>
                 </a:solidFill>
                 <a:latin typeface="Arial"/>
               </a:rPr>
@@ -5366,8 +5226,78 @@
         </p:nvSpPr>
         <p:spPr>
           <a:xfrm>
-            <a:off x="594360" y="2980944"/>
-            <a:ext cx="11002975" cy="347472"/>
+            <a:off x="640080" y="2985516"/>
+            <a:ext cx="10911535" cy="731520"/>
+          </a:xfrm>
+          <a:prstGeom prst="rect">
+            <a:avLst/>
+          </a:prstGeom>
+          <a:noFill/>
+        </p:spPr>
+        <p:txBody>
+          <a:bodyPr wrap="square">
+            <a:spAutoFit/>
+          </a:bodyPr>
+          <a:lstStyle/>
+          <a:p>
+            <a:pPr algn="ctr"/>
+            <a:r>
+              <a:rPr sz="4800" b="1" i="0">
+                <a:solidFill>
+                  <a:srgbClr val="FFFFFF"/>
+                </a:solidFill>
+                <a:latin typeface="Arial"/>
+              </a:rPr>
+              <a:t>つみより深いあわれみ</a:t>
+            </a:r>
+          </a:p>
+        </p:txBody>
+      </p:sp>
+      <p:sp>
+        <p:nvSpPr>
+          <p:cNvPr id="5" name="TextBox 4"/>
+          <p:cNvSpPr txBox="1"/>
+          <p:nvPr/>
+        </p:nvSpPr>
+        <p:spPr>
+          <a:xfrm>
+            <a:off x="640080" y="3753612"/>
+            <a:ext cx="10911535" cy="365760"/>
+          </a:xfrm>
+          <a:prstGeom prst="rect">
+            <a:avLst/>
+          </a:prstGeom>
+          <a:noFill/>
+        </p:spPr>
+        <p:txBody>
+          <a:bodyPr wrap="square">
+            <a:spAutoFit/>
+          </a:bodyPr>
+          <a:lstStyle/>
+          <a:p>
+            <a:pPr algn="ctr"/>
+            <a:r>
+              <a:rPr sz="2400" b="0" i="1">
+                <a:solidFill>
+                  <a:srgbClr val="AAAAAA"/>
+                </a:solidFill>
+                <a:latin typeface="Arial"/>
+              </a:rPr>
+              <a:t>tsumi    yori fukai awaremi</a:t>
+            </a:r>
+          </a:p>
+        </p:txBody>
+      </p:sp>
+      <p:sp>
+        <p:nvSpPr>
+          <p:cNvPr id="6" name="TextBox 5"/>
+          <p:cNvSpPr txBox="1"/>
+          <p:nvPr/>
+        </p:nvSpPr>
+        <p:spPr>
+          <a:xfrm>
+            <a:off x="640080" y="4530852"/>
+            <a:ext cx="10911535" cy="310896"/>
           </a:xfrm>
           <a:prstGeom prst="rect">
             <a:avLst/>
@@ -5384,7 +5314,7 @@
             <a:r>
               <a:rPr sz="2000" b="0" i="1">
                 <a:solidFill>
-                  <a:srgbClr val="8C8C8C"/>
+                  <a:srgbClr val="828282"/>
                 </a:solidFill>
                 <a:latin typeface="Arial"/>
               </a:rPr>
@@ -5395,84 +5325,14 @@
       </p:sp>
       <p:sp>
         <p:nvSpPr>
-          <p:cNvPr id="5" name="TextBox 4"/>
-          <p:cNvSpPr txBox="1"/>
-          <p:nvPr/>
-        </p:nvSpPr>
-        <p:spPr>
-          <a:xfrm>
-            <a:off x="594360" y="3529584"/>
-            <a:ext cx="11002975" cy="685800"/>
-          </a:xfrm>
-          <a:prstGeom prst="rect">
-            <a:avLst/>
-          </a:prstGeom>
-          <a:noFill/>
-        </p:spPr>
-        <p:txBody>
-          <a:bodyPr wrap="square">
-            <a:spAutoFit/>
-          </a:bodyPr>
-          <a:lstStyle/>
-          <a:p>
-            <a:pPr algn="ctr"/>
-            <a:r>
-              <a:rPr sz="4400" b="1" i="0">
-                <a:solidFill>
-                  <a:srgbClr val="FFFFFF"/>
-                </a:solidFill>
-                <a:latin typeface="Arial"/>
-              </a:rPr>
-              <a:t>つみより深いあわれみ</a:t>
-            </a:r>
-          </a:p>
-        </p:txBody>
-      </p:sp>
-      <p:sp>
-        <p:nvSpPr>
-          <p:cNvPr id="6" name="TextBox 5"/>
-          <p:cNvSpPr txBox="1"/>
-          <p:nvPr/>
-        </p:nvSpPr>
-        <p:spPr>
-          <a:xfrm>
-            <a:off x="594360" y="4251960"/>
-            <a:ext cx="11002975" cy="384048"/>
-          </a:xfrm>
-          <a:prstGeom prst="rect">
-            <a:avLst/>
-          </a:prstGeom>
-          <a:noFill/>
-        </p:spPr>
-        <p:txBody>
-          <a:bodyPr wrap="square">
-            <a:spAutoFit/>
-          </a:bodyPr>
-          <a:lstStyle/>
-          <a:p>
-            <a:pPr algn="ctr"/>
-            <a:r>
-              <a:rPr sz="2400" b="0" i="1">
-                <a:solidFill>
-                  <a:srgbClr val="B4B4B4"/>
-                </a:solidFill>
-                <a:latin typeface="Arial"/>
-              </a:rPr>
-              <a:t>tsumi    yori fukai awaremi</a:t>
-            </a:r>
-          </a:p>
-        </p:txBody>
-      </p:sp>
-      <p:sp>
-        <p:nvSpPr>
           <p:cNvPr id="7" name="TextBox 6"/>
           <p:cNvSpPr txBox="1"/>
           <p:nvPr/>
         </p:nvSpPr>
         <p:spPr>
           <a:xfrm>
-            <a:off x="594360" y="4672584"/>
-            <a:ext cx="11002975" cy="347472"/>
+            <a:off x="640080" y="4896612"/>
+            <a:ext cx="10911535" cy="310896"/>
           </a:xfrm>
           <a:prstGeom prst="rect">
             <a:avLst/>
@@ -5489,7 +5349,7 @@
             <a:r>
               <a:rPr sz="2000" b="0" i="1">
                 <a:solidFill>
-                  <a:srgbClr val="8C8C8C"/>
+                  <a:srgbClr val="828282"/>
                 </a:solidFill>
                 <a:latin typeface="Arial"/>
               </a:rPr>
@@ -5532,23 +5392,23 @@
         </p:nvSpPr>
         <p:spPr>
           <a:xfrm>
-            <a:off x="594360" y="2258568"/>
-            <a:ext cx="11002975" cy="685800"/>
-          </a:xfrm>
-          <a:prstGeom prst="rect">
-            <a:avLst/>
-          </a:prstGeom>
-          <a:noFill/>
-        </p:spPr>
-        <p:txBody>
-          <a:bodyPr wrap="square">
-            <a:spAutoFit/>
-          </a:bodyPr>
-          <a:lstStyle/>
-          <a:p>
-            <a:pPr algn="ctr"/>
-            <a:r>
-              <a:rPr sz="4400" b="1" i="0">
+            <a:off x="640080" y="2052828"/>
+            <a:ext cx="10911535" cy="731520"/>
+          </a:xfrm>
+          <a:prstGeom prst="rect">
+            <a:avLst/>
+          </a:prstGeom>
+          <a:noFill/>
+        </p:spPr>
+        <p:txBody>
+          <a:bodyPr wrap="square">
+            <a:spAutoFit/>
+          </a:bodyPr>
+          <a:lstStyle/>
+          <a:p>
+            <a:pPr algn="ctr"/>
+            <a:r>
+              <a:rPr sz="4800" b="1" i="0">
                 <a:solidFill>
                   <a:srgbClr val="FFFFFF"/>
                 </a:solidFill>
@@ -5567,25 +5427,60 @@
         </p:nvSpPr>
         <p:spPr>
           <a:xfrm>
-            <a:off x="594360" y="2980944"/>
-            <a:ext cx="11002975" cy="347472"/>
-          </a:xfrm>
-          <a:prstGeom prst="rect">
-            <a:avLst/>
-          </a:prstGeom>
-          <a:noFill/>
-        </p:spPr>
-        <p:txBody>
-          <a:bodyPr wrap="square">
-            <a:spAutoFit/>
-          </a:bodyPr>
-          <a:lstStyle/>
-          <a:p>
-            <a:pPr algn="ctr"/>
-            <a:r>
-              <a:rPr sz="2200" b="0" i="1">
-                <a:solidFill>
-                  <a:srgbClr val="8C8C8C"/>
+            <a:off x="640080" y="2985516"/>
+            <a:ext cx="10911535" cy="731520"/>
+          </a:xfrm>
+          <a:prstGeom prst="rect">
+            <a:avLst/>
+          </a:prstGeom>
+          <a:noFill/>
+        </p:spPr>
+        <p:txBody>
+          <a:bodyPr wrap="square">
+            <a:spAutoFit/>
+          </a:bodyPr>
+          <a:lstStyle/>
+          <a:p>
+            <a:pPr algn="ctr"/>
+            <a:r>
+              <a:rPr sz="4800" b="1" i="0">
+                <a:solidFill>
+                  <a:srgbClr val="FFFFFF"/>
+                </a:solidFill>
+                <a:latin typeface="Arial"/>
+              </a:rPr>
+              <a:t>Nossos pecados são muitos</a:t>
+            </a:r>
+          </a:p>
+        </p:txBody>
+      </p:sp>
+      <p:sp>
+        <p:nvSpPr>
+          <p:cNvPr id="4" name="TextBox 3"/>
+          <p:cNvSpPr txBox="1"/>
+          <p:nvPr/>
+        </p:nvSpPr>
+        <p:spPr>
+          <a:xfrm>
+            <a:off x="640080" y="4128516"/>
+            <a:ext cx="10911535" cy="310896"/>
+          </a:xfrm>
+          <a:prstGeom prst="rect">
+            <a:avLst/>
+          </a:prstGeom>
+          <a:noFill/>
+        </p:spPr>
+        <p:txBody>
+          <a:bodyPr wrap="square">
+            <a:spAutoFit/>
+          </a:bodyPr>
+          <a:lstStyle/>
+          <a:p>
+            <a:pPr algn="ctr"/>
+            <a:r>
+              <a:rPr sz="2000" b="0" i="0">
+                <a:solidFill>
+                  <a:srgbClr val="828282"/>
                 </a:solidFill>
                 <a:latin typeface="Arial"/>
               </a:rPr>
@@ -5596,66 +5491,31 @@
       </p:sp>
       <p:sp>
         <p:nvSpPr>
-          <p:cNvPr id="4" name="TextBox 3"/>
-          <p:cNvSpPr txBox="1"/>
-          <p:nvPr/>
-        </p:nvSpPr>
-        <p:spPr>
-          <a:xfrm>
-            <a:off x="594360" y="3529584"/>
-            <a:ext cx="11002975" cy="685800"/>
-          </a:xfrm>
-          <a:prstGeom prst="rect">
-            <a:avLst/>
-          </a:prstGeom>
-          <a:noFill/>
-        </p:spPr>
-        <p:txBody>
-          <a:bodyPr wrap="square">
-            <a:spAutoFit/>
-          </a:bodyPr>
-          <a:lstStyle/>
-          <a:p>
-            <a:pPr algn="ctr"/>
-            <a:r>
-              <a:rPr sz="4400" b="1" i="0">
-                <a:solidFill>
-                  <a:srgbClr val="FFFFFF"/>
-                </a:solidFill>
-                <a:latin typeface="Arial"/>
-              </a:rPr>
-              <a:t>Nossos pecados são muitos</a:t>
-            </a:r>
-          </a:p>
-        </p:txBody>
-      </p:sp>
-      <p:sp>
-        <p:nvSpPr>
           <p:cNvPr id="5" name="TextBox 4"/>
           <p:cNvSpPr txBox="1"/>
           <p:nvPr/>
         </p:nvSpPr>
         <p:spPr>
           <a:xfrm>
-            <a:off x="594360" y="4251960"/>
-            <a:ext cx="11002975" cy="347472"/>
-          </a:xfrm>
-          <a:prstGeom prst="rect">
-            <a:avLst/>
-          </a:prstGeom>
-          <a:noFill/>
-        </p:spPr>
-        <p:txBody>
-          <a:bodyPr wrap="square">
-            <a:spAutoFit/>
-          </a:bodyPr>
-          <a:lstStyle/>
-          <a:p>
-            <a:pPr algn="ctr"/>
-            <a:r>
-              <a:rPr sz="2200" b="0" i="1">
-                <a:solidFill>
-                  <a:srgbClr val="8C8C8C"/>
+            <a:off x="640080" y="4494276"/>
+            <a:ext cx="10911535" cy="310896"/>
+          </a:xfrm>
+          <a:prstGeom prst="rect">
+            <a:avLst/>
+          </a:prstGeom>
+          <a:noFill/>
+        </p:spPr>
+        <p:txBody>
+          <a:bodyPr wrap="square">
+            <a:spAutoFit/>
+          </a:bodyPr>
+          <a:lstStyle/>
+          <a:p>
+            <a:pPr algn="ctr"/>
+            <a:r>
+              <a:rPr sz="2000" b="0" i="0">
+                <a:solidFill>
+                  <a:srgbClr val="828282"/>
                 </a:solidFill>
                 <a:latin typeface="Arial"/>
               </a:rPr>
@@ -5698,23 +5558,23 @@
         </p:nvSpPr>
         <p:spPr>
           <a:xfrm>
-            <a:off x="594360" y="2258568"/>
-            <a:ext cx="11002975" cy="685800"/>
-          </a:xfrm>
-          <a:prstGeom prst="rect">
-            <a:avLst/>
-          </a:prstGeom>
-          <a:noFill/>
-        </p:spPr>
-        <p:txBody>
-          <a:bodyPr wrap="square">
-            <a:spAutoFit/>
-          </a:bodyPr>
-          <a:lstStyle/>
-          <a:p>
-            <a:pPr algn="ctr"/>
-            <a:r>
-              <a:rPr sz="4400" b="1" i="0">
+            <a:off x="640080" y="2052828"/>
+            <a:ext cx="10911535" cy="731520"/>
+          </a:xfrm>
+          <a:prstGeom prst="rect">
+            <a:avLst/>
+          </a:prstGeom>
+          <a:noFill/>
+        </p:spPr>
+        <p:txBody>
+          <a:bodyPr wrap="square">
+            <a:spAutoFit/>
+          </a:bodyPr>
+          <a:lstStyle/>
+          <a:p>
+            <a:pPr algn="ctr"/>
+            <a:r>
+              <a:rPr sz="4800" b="1" i="0">
                 <a:solidFill>
                   <a:srgbClr val="FFFFFF"/>
                 </a:solidFill>
@@ -5733,99 +5593,64 @@
         </p:nvSpPr>
         <p:spPr>
           <a:xfrm>
-            <a:off x="594360" y="2980944"/>
-            <a:ext cx="11002975" cy="347472"/>
-          </a:xfrm>
-          <a:prstGeom prst="rect">
-            <a:avLst/>
-          </a:prstGeom>
-          <a:noFill/>
-        </p:spPr>
-        <p:txBody>
-          <a:bodyPr wrap="square">
-            <a:spAutoFit/>
-          </a:bodyPr>
-          <a:lstStyle/>
-          <a:p>
-            <a:pPr algn="ctr"/>
-            <a:r>
-              <a:rPr sz="2200" b="0" i="1">
-                <a:solidFill>
-                  <a:srgbClr val="8C8C8C"/>
+            <a:off x="640080" y="2985516"/>
+            <a:ext cx="10911535" cy="731520"/>
+          </a:xfrm>
+          <a:prstGeom prst="rect">
+            <a:avLst/>
+          </a:prstGeom>
+          <a:noFill/>
+        </p:spPr>
+        <p:txBody>
+          <a:bodyPr wrap="square">
+            <a:spAutoFit/>
+          </a:bodyPr>
+          <a:lstStyle/>
+          <a:p>
+            <a:pPr algn="ctr"/>
+            <a:r>
+              <a:rPr sz="4800" b="1" i="0">
+                <a:solidFill>
+                  <a:srgbClr val="FFFFFF"/>
+                </a:solidFill>
+                <a:latin typeface="Arial"/>
+              </a:rPr>
+              <a:t>Sua misericórdia é mais</a:t>
+            </a:r>
+          </a:p>
+        </p:txBody>
+      </p:sp>
+      <p:sp>
+        <p:nvSpPr>
+          <p:cNvPr id="4" name="TextBox 3"/>
+          <p:cNvSpPr txBox="1"/>
+          <p:nvPr/>
+        </p:nvSpPr>
+        <p:spPr>
+          <a:xfrm>
+            <a:off x="640080" y="4128516"/>
+            <a:ext cx="10911535" cy="310896"/>
+          </a:xfrm>
+          <a:prstGeom prst="rect">
+            <a:avLst/>
+          </a:prstGeom>
+          <a:noFill/>
+        </p:spPr>
+        <p:txBody>
+          <a:bodyPr wrap="square">
+            <a:spAutoFit/>
+          </a:bodyPr>
+          <a:lstStyle/>
+          <a:p>
+            <a:pPr algn="ctr"/>
+            <a:r>
+              <a:rPr sz="2000" b="0" i="0">
+                <a:solidFill>
+                  <a:srgbClr val="828282"/>
                 </a:solidFill>
                 <a:latin typeface="Arial"/>
               </a:rPr>
               <a:t>つみより深い あわれみ</a:t>
-            </a:r>
-          </a:p>
-        </p:txBody>
-      </p:sp>
-      <p:sp>
-        <p:nvSpPr>
-          <p:cNvPr id="4" name="TextBox 3"/>
-          <p:cNvSpPr txBox="1"/>
-          <p:nvPr/>
-        </p:nvSpPr>
-        <p:spPr>
-          <a:xfrm>
-            <a:off x="594360" y="3529584"/>
-            <a:ext cx="11002975" cy="685800"/>
-          </a:xfrm>
-          <a:prstGeom prst="rect">
-            <a:avLst/>
-          </a:prstGeom>
-          <a:noFill/>
-        </p:spPr>
-        <p:txBody>
-          <a:bodyPr wrap="square">
-            <a:spAutoFit/>
-          </a:bodyPr>
-          <a:lstStyle/>
-          <a:p>
-            <a:pPr algn="ctr"/>
-            <a:r>
-              <a:rPr sz="4400" b="1" i="0">
-                <a:solidFill>
-                  <a:srgbClr val="FFFFFF"/>
-                </a:solidFill>
-                <a:latin typeface="Arial"/>
-              </a:rPr>
-              <a:t>Sua misericórdia é mais</a:t>
-            </a:r>
-          </a:p>
-        </p:txBody>
-      </p:sp>
-      <p:sp>
-        <p:nvSpPr>
-          <p:cNvPr id="5" name="TextBox 4"/>
-          <p:cNvSpPr txBox="1"/>
-          <p:nvPr/>
-        </p:nvSpPr>
-        <p:spPr>
-          <a:xfrm>
-            <a:off x="594360" y="4251960"/>
-            <a:ext cx="11002975" cy="347472"/>
-          </a:xfrm>
-          <a:prstGeom prst="rect">
-            <a:avLst/>
-          </a:prstGeom>
-          <a:noFill/>
-        </p:spPr>
-        <p:txBody>
-          <a:bodyPr wrap="square">
-            <a:spAutoFit/>
-          </a:bodyPr>
-          <a:lstStyle/>
-          <a:p>
-            <a:pPr algn="ctr"/>
-            <a:r>
-              <a:rPr sz="2200" b="0" i="1">
-                <a:solidFill>
-                  <a:srgbClr val="8C8C8C"/>
-                </a:solidFill>
-                <a:latin typeface="Arial"/>
-              </a:rPr>
-              <a:t/>
             </a:r>
           </a:p>
         </p:txBody>
@@ -5864,23 +5689,23 @@
         </p:nvSpPr>
         <p:spPr>
           <a:xfrm>
-            <a:off x="594360" y="2258568"/>
-            <a:ext cx="11002975" cy="685800"/>
-          </a:xfrm>
-          <a:prstGeom prst="rect">
-            <a:avLst/>
-          </a:prstGeom>
-          <a:noFill/>
-        </p:spPr>
-        <p:txBody>
-          <a:bodyPr wrap="square">
-            <a:spAutoFit/>
-          </a:bodyPr>
-          <a:lstStyle/>
-          <a:p>
-            <a:pPr algn="ctr"/>
-            <a:r>
-              <a:rPr sz="4400" b="1" i="0">
+            <a:off x="640080" y="2052828"/>
+            <a:ext cx="10911535" cy="731520"/>
+          </a:xfrm>
+          <a:prstGeom prst="rect">
+            <a:avLst/>
+          </a:prstGeom>
+          <a:noFill/>
+        </p:spPr>
+        <p:txBody>
+          <a:bodyPr wrap="square">
+            <a:spAutoFit/>
+          </a:bodyPr>
+          <a:lstStyle/>
+          <a:p>
+            <a:pPr algn="ctr"/>
+            <a:r>
+              <a:rPr sz="4800" b="1" i="0">
                 <a:solidFill>
                   <a:srgbClr val="FFFFFF"/>
                 </a:solidFill>
@@ -5899,99 +5724,29 @@
         </p:nvSpPr>
         <p:spPr>
           <a:xfrm>
-            <a:off x="594360" y="2980944"/>
-            <a:ext cx="11002975" cy="347472"/>
-          </a:xfrm>
-          <a:prstGeom prst="rect">
-            <a:avLst/>
-          </a:prstGeom>
-          <a:noFill/>
-        </p:spPr>
-        <p:txBody>
-          <a:bodyPr wrap="square">
-            <a:spAutoFit/>
-          </a:bodyPr>
-          <a:lstStyle/>
-          <a:p>
-            <a:pPr algn="ctr"/>
-            <a:r>
-              <a:rPr sz="2200" b="0" i="1">
-                <a:solidFill>
-                  <a:srgbClr val="8C8C8C"/>
-                </a:solidFill>
-                <a:latin typeface="Arial"/>
-              </a:rPr>
-              <a:t/>
-            </a:r>
-          </a:p>
-        </p:txBody>
-      </p:sp>
-      <p:sp>
-        <p:nvSpPr>
-          <p:cNvPr id="4" name="TextBox 3"/>
-          <p:cNvSpPr txBox="1"/>
-          <p:nvPr/>
-        </p:nvSpPr>
-        <p:spPr>
-          <a:xfrm>
-            <a:off x="594360" y="3529584"/>
-            <a:ext cx="11002975" cy="685800"/>
-          </a:xfrm>
-          <a:prstGeom prst="rect">
-            <a:avLst/>
-          </a:prstGeom>
-          <a:noFill/>
-        </p:spPr>
-        <p:txBody>
-          <a:bodyPr wrap="square">
-            <a:spAutoFit/>
-          </a:bodyPr>
-          <a:lstStyle/>
-          <a:p>
-            <a:pPr algn="ctr"/>
-            <a:r>
-              <a:rPr sz="4400" b="1" i="0">
+            <a:off x="640080" y="2985516"/>
+            <a:ext cx="10911535" cy="731520"/>
+          </a:xfrm>
+          <a:prstGeom prst="rect">
+            <a:avLst/>
+          </a:prstGeom>
+          <a:noFill/>
+        </p:spPr>
+        <p:txBody>
+          <a:bodyPr wrap="square">
+            <a:spAutoFit/>
+          </a:bodyPr>
+          <a:lstStyle/>
+          <a:p>
+            <a:pPr algn="ctr"/>
+            <a:r>
+              <a:rPr sz="4800" b="1" i="0">
                 <a:solidFill>
                   <a:srgbClr val="FFFFFF"/>
                 </a:solidFill>
                 <a:latin typeface="Arial"/>
               </a:rPr>
               <a:t>Sua misericórdia é mais</a:t>
-            </a:r>
-          </a:p>
-        </p:txBody>
-      </p:sp>
-      <p:sp>
-        <p:nvSpPr>
-          <p:cNvPr id="5" name="TextBox 4"/>
-          <p:cNvSpPr txBox="1"/>
-          <p:nvPr/>
-        </p:nvSpPr>
-        <p:spPr>
-          <a:xfrm>
-            <a:off x="594360" y="4251960"/>
-            <a:ext cx="11002975" cy="347472"/>
-          </a:xfrm>
-          <a:prstGeom prst="rect">
-            <a:avLst/>
-          </a:prstGeom>
-          <a:noFill/>
-        </p:spPr>
-        <p:txBody>
-          <a:bodyPr wrap="square">
-            <a:spAutoFit/>
-          </a:bodyPr>
-          <a:lstStyle/>
-          <a:p>
-            <a:pPr algn="ctr"/>
-            <a:r>
-              <a:rPr sz="2200" b="0" i="1">
-                <a:solidFill>
-                  <a:srgbClr val="8C8C8C"/>
-                </a:solidFill>
-                <a:latin typeface="Arial"/>
-              </a:rPr>
-              <a:t/>
             </a:r>
           </a:p>
         </p:txBody>
@@ -6030,23 +5785,23 @@
         </p:nvSpPr>
         <p:spPr>
           <a:xfrm>
-            <a:off x="594360" y="2258568"/>
-            <a:ext cx="11002975" cy="685800"/>
-          </a:xfrm>
-          <a:prstGeom prst="rect">
-            <a:avLst/>
-          </a:prstGeom>
-          <a:noFill/>
-        </p:spPr>
-        <p:txBody>
-          <a:bodyPr wrap="square">
-            <a:spAutoFit/>
-          </a:bodyPr>
-          <a:lstStyle/>
-          <a:p>
-            <a:pPr algn="ctr"/>
-            <a:r>
-              <a:rPr sz="4400" b="1" i="0">
+            <a:off x="640080" y="2052828"/>
+            <a:ext cx="10911535" cy="731520"/>
+          </a:xfrm>
+          <a:prstGeom prst="rect">
+            <a:avLst/>
+          </a:prstGeom>
+          <a:noFill/>
+        </p:spPr>
+        <p:txBody>
+          <a:bodyPr wrap="square">
+            <a:spAutoFit/>
+          </a:bodyPr>
+          <a:lstStyle/>
+          <a:p>
+            <a:pPr algn="ctr"/>
+            <a:r>
+              <a:rPr sz="4800" b="1" i="0">
                 <a:solidFill>
                   <a:srgbClr val="FFFFFF"/>
                 </a:solidFill>
@@ -6065,25 +5820,60 @@
         </p:nvSpPr>
         <p:spPr>
           <a:xfrm>
-            <a:off x="594360" y="2980944"/>
-            <a:ext cx="11002975" cy="347472"/>
-          </a:xfrm>
-          <a:prstGeom prst="rect">
-            <a:avLst/>
-          </a:prstGeom>
-          <a:noFill/>
-        </p:spPr>
-        <p:txBody>
-          <a:bodyPr wrap="square">
-            <a:spAutoFit/>
-          </a:bodyPr>
-          <a:lstStyle/>
-          <a:p>
-            <a:pPr algn="ctr"/>
-            <a:r>
-              <a:rPr sz="2200" b="0" i="1">
-                <a:solidFill>
-                  <a:srgbClr val="8C8C8C"/>
+            <a:off x="640080" y="2985516"/>
+            <a:ext cx="10911535" cy="731520"/>
+          </a:xfrm>
+          <a:prstGeom prst="rect">
+            <a:avLst/>
+          </a:prstGeom>
+          <a:noFill/>
+        </p:spPr>
+        <p:txBody>
+          <a:bodyPr wrap="square">
+            <a:spAutoFit/>
+          </a:bodyPr>
+          <a:lstStyle/>
+          <a:p>
+            <a:pPr algn="ctr"/>
+            <a:r>
+              <a:rPr sz="4800" b="1" i="0">
+                <a:solidFill>
+                  <a:srgbClr val="FFFFFF"/>
+                </a:solidFill>
+                <a:latin typeface="Arial"/>
+              </a:rPr>
+              <a:t>Nossos pecados são muitos</a:t>
+            </a:r>
+          </a:p>
+        </p:txBody>
+      </p:sp>
+      <p:sp>
+        <p:nvSpPr>
+          <p:cNvPr id="4" name="TextBox 3"/>
+          <p:cNvSpPr txBox="1"/>
+          <p:nvPr/>
+        </p:nvSpPr>
+        <p:spPr>
+          <a:xfrm>
+            <a:off x="640080" y="4128516"/>
+            <a:ext cx="10911535" cy="310896"/>
+          </a:xfrm>
+          <a:prstGeom prst="rect">
+            <a:avLst/>
+          </a:prstGeom>
+          <a:noFill/>
+        </p:spPr>
+        <p:txBody>
+          <a:bodyPr wrap="square">
+            <a:spAutoFit/>
+          </a:bodyPr>
+          <a:lstStyle/>
+          <a:p>
+            <a:pPr algn="ctr"/>
+            <a:r>
+              <a:rPr sz="2000" b="0" i="0">
+                <a:solidFill>
+                  <a:srgbClr val="828282"/>
                 </a:solidFill>
                 <a:latin typeface="Arial"/>
               </a:rPr>
@@ -6094,66 +5884,31 @@
       </p:sp>
       <p:sp>
         <p:nvSpPr>
-          <p:cNvPr id="4" name="TextBox 3"/>
-          <p:cNvSpPr txBox="1"/>
-          <p:nvPr/>
-        </p:nvSpPr>
-        <p:spPr>
-          <a:xfrm>
-            <a:off x="594360" y="3529584"/>
-            <a:ext cx="11002975" cy="685800"/>
-          </a:xfrm>
-          <a:prstGeom prst="rect">
-            <a:avLst/>
-          </a:prstGeom>
-          <a:noFill/>
-        </p:spPr>
-        <p:txBody>
-          <a:bodyPr wrap="square">
-            <a:spAutoFit/>
-          </a:bodyPr>
-          <a:lstStyle/>
-          <a:p>
-            <a:pPr algn="ctr"/>
-            <a:r>
-              <a:rPr sz="4400" b="1" i="0">
-                <a:solidFill>
-                  <a:srgbClr val="FFFFFF"/>
-                </a:solidFill>
-                <a:latin typeface="Arial"/>
-              </a:rPr>
-              <a:t>Nossos pecados são muitos</a:t>
-            </a:r>
-          </a:p>
-        </p:txBody>
-      </p:sp>
-      <p:sp>
-        <p:nvSpPr>
           <p:cNvPr id="5" name="TextBox 4"/>
           <p:cNvSpPr txBox="1"/>
           <p:nvPr/>
         </p:nvSpPr>
         <p:spPr>
           <a:xfrm>
-            <a:off x="594360" y="4251960"/>
-            <a:ext cx="11002975" cy="347472"/>
-          </a:xfrm>
-          <a:prstGeom prst="rect">
-            <a:avLst/>
-          </a:prstGeom>
-          <a:noFill/>
-        </p:spPr>
-        <p:txBody>
-          <a:bodyPr wrap="square">
-            <a:spAutoFit/>
-          </a:bodyPr>
-          <a:lstStyle/>
-          <a:p>
-            <a:pPr algn="ctr"/>
-            <a:r>
-              <a:rPr sz="2200" b="0" i="1">
-                <a:solidFill>
-                  <a:srgbClr val="8C8C8C"/>
+            <a:off x="640080" y="4494276"/>
+            <a:ext cx="10911535" cy="310896"/>
+          </a:xfrm>
+          <a:prstGeom prst="rect">
+            <a:avLst/>
+          </a:prstGeom>
+          <a:noFill/>
+        </p:spPr>
+        <p:txBody>
+          <a:bodyPr wrap="square">
+            <a:spAutoFit/>
+          </a:bodyPr>
+          <a:lstStyle/>
+          <a:p>
+            <a:pPr algn="ctr"/>
+            <a:r>
+              <a:rPr sz="2000" b="0" i="0">
+                <a:solidFill>
+                  <a:srgbClr val="828282"/>
                 </a:solidFill>
                 <a:latin typeface="Arial"/>
               </a:rPr>
@@ -6196,23 +5951,23 @@
         </p:nvSpPr>
         <p:spPr>
           <a:xfrm>
-            <a:off x="594360" y="2258568"/>
-            <a:ext cx="11002975" cy="685800"/>
-          </a:xfrm>
-          <a:prstGeom prst="rect">
-            <a:avLst/>
-          </a:prstGeom>
-          <a:noFill/>
-        </p:spPr>
-        <p:txBody>
-          <a:bodyPr wrap="square">
-            <a:spAutoFit/>
-          </a:bodyPr>
-          <a:lstStyle/>
-          <a:p>
-            <a:pPr algn="ctr"/>
-            <a:r>
-              <a:rPr sz="4400" b="1" i="0">
+            <a:off x="640080" y="2052828"/>
+            <a:ext cx="10911535" cy="731520"/>
+          </a:xfrm>
+          <a:prstGeom prst="rect">
+            <a:avLst/>
+          </a:prstGeom>
+          <a:noFill/>
+        </p:spPr>
+        <p:txBody>
+          <a:bodyPr wrap="square">
+            <a:spAutoFit/>
+          </a:bodyPr>
+          <a:lstStyle/>
+          <a:p>
+            <a:pPr algn="ctr"/>
+            <a:r>
+              <a:rPr sz="4800" b="1" i="0">
                 <a:solidFill>
                   <a:srgbClr val="FFFFFF"/>
                 </a:solidFill>
@@ -6231,99 +5986,64 @@
         </p:nvSpPr>
         <p:spPr>
           <a:xfrm>
-            <a:off x="594360" y="2980944"/>
-            <a:ext cx="11002975" cy="347472"/>
-          </a:xfrm>
-          <a:prstGeom prst="rect">
-            <a:avLst/>
-          </a:prstGeom>
-          <a:noFill/>
-        </p:spPr>
-        <p:txBody>
-          <a:bodyPr wrap="square">
-            <a:spAutoFit/>
-          </a:bodyPr>
-          <a:lstStyle/>
-          <a:p>
-            <a:pPr algn="ctr"/>
-            <a:r>
-              <a:rPr sz="2200" b="0" i="1">
-                <a:solidFill>
-                  <a:srgbClr val="8C8C8C"/>
+            <a:off x="640080" y="2985516"/>
+            <a:ext cx="10911535" cy="731520"/>
+          </a:xfrm>
+          <a:prstGeom prst="rect">
+            <a:avLst/>
+          </a:prstGeom>
+          <a:noFill/>
+        </p:spPr>
+        <p:txBody>
+          <a:bodyPr wrap="square">
+            <a:spAutoFit/>
+          </a:bodyPr>
+          <a:lstStyle/>
+          <a:p>
+            <a:pPr algn="ctr"/>
+            <a:r>
+              <a:rPr sz="4800" b="1" i="0">
+                <a:solidFill>
+                  <a:srgbClr val="FFFFFF"/>
+                </a:solidFill>
+                <a:latin typeface="Arial"/>
+              </a:rPr>
+              <a:t>Sua misericórdia é mais</a:t>
+            </a:r>
+          </a:p>
+        </p:txBody>
+      </p:sp>
+      <p:sp>
+        <p:nvSpPr>
+          <p:cNvPr id="4" name="TextBox 3"/>
+          <p:cNvSpPr txBox="1"/>
+          <p:nvPr/>
+        </p:nvSpPr>
+        <p:spPr>
+          <a:xfrm>
+            <a:off x="640080" y="4128516"/>
+            <a:ext cx="10911535" cy="310896"/>
+          </a:xfrm>
+          <a:prstGeom prst="rect">
+            <a:avLst/>
+          </a:prstGeom>
+          <a:noFill/>
+        </p:spPr>
+        <p:txBody>
+          <a:bodyPr wrap="square">
+            <a:spAutoFit/>
+          </a:bodyPr>
+          <a:lstStyle/>
+          <a:p>
+            <a:pPr algn="ctr"/>
+            <a:r>
+              <a:rPr sz="2000" b="0" i="0">
+                <a:solidFill>
+                  <a:srgbClr val="828282"/>
                 </a:solidFill>
                 <a:latin typeface="Arial"/>
               </a:rPr>
               <a:t>つみより深い あわれみ</a:t>
-            </a:r>
-          </a:p>
-        </p:txBody>
-      </p:sp>
-      <p:sp>
-        <p:nvSpPr>
-          <p:cNvPr id="4" name="TextBox 3"/>
-          <p:cNvSpPr txBox="1"/>
-          <p:nvPr/>
-        </p:nvSpPr>
-        <p:spPr>
-          <a:xfrm>
-            <a:off x="594360" y="3529584"/>
-            <a:ext cx="11002975" cy="685800"/>
-          </a:xfrm>
-          <a:prstGeom prst="rect">
-            <a:avLst/>
-          </a:prstGeom>
-          <a:noFill/>
-        </p:spPr>
-        <p:txBody>
-          <a:bodyPr wrap="square">
-            <a:spAutoFit/>
-          </a:bodyPr>
-          <a:lstStyle/>
-          <a:p>
-            <a:pPr algn="ctr"/>
-            <a:r>
-              <a:rPr sz="4400" b="1" i="0">
-                <a:solidFill>
-                  <a:srgbClr val="FFFFFF"/>
-                </a:solidFill>
-                <a:latin typeface="Arial"/>
-              </a:rPr>
-              <a:t>Sua misericórdia é mais</a:t>
-            </a:r>
-          </a:p>
-        </p:txBody>
-      </p:sp>
-      <p:sp>
-        <p:nvSpPr>
-          <p:cNvPr id="5" name="TextBox 4"/>
-          <p:cNvSpPr txBox="1"/>
-          <p:nvPr/>
-        </p:nvSpPr>
-        <p:spPr>
-          <a:xfrm>
-            <a:off x="594360" y="4251960"/>
-            <a:ext cx="11002975" cy="347472"/>
-          </a:xfrm>
-          <a:prstGeom prst="rect">
-            <a:avLst/>
-          </a:prstGeom>
-          <a:noFill/>
-        </p:spPr>
-        <p:txBody>
-          <a:bodyPr wrap="square">
-            <a:spAutoFit/>
-          </a:bodyPr>
-          <a:lstStyle/>
-          <a:p>
-            <a:pPr algn="ctr"/>
-            <a:r>
-              <a:rPr sz="2200" b="0" i="1">
-                <a:solidFill>
-                  <a:srgbClr val="8C8C8C"/>
-                </a:solidFill>
-                <a:latin typeface="Arial"/>
-              </a:rPr>
-              <a:t/>
             </a:r>
           </a:p>
         </p:txBody>
@@ -6362,23 +6082,23 @@
         </p:nvSpPr>
         <p:spPr>
           <a:xfrm>
-            <a:off x="594360" y="2258568"/>
-            <a:ext cx="11002975" cy="685800"/>
-          </a:xfrm>
-          <a:prstGeom prst="rect">
-            <a:avLst/>
-          </a:prstGeom>
-          <a:noFill/>
-        </p:spPr>
-        <p:txBody>
-          <a:bodyPr wrap="square">
-            <a:spAutoFit/>
-          </a:bodyPr>
-          <a:lstStyle/>
-          <a:p>
-            <a:pPr algn="ctr"/>
-            <a:r>
-              <a:rPr sz="4400" b="1" i="0">
+            <a:off x="640080" y="2052828"/>
+            <a:ext cx="10911535" cy="731520"/>
+          </a:xfrm>
+          <a:prstGeom prst="rect">
+            <a:avLst/>
+          </a:prstGeom>
+          <a:noFill/>
+        </p:spPr>
+        <p:txBody>
+          <a:bodyPr wrap="square">
+            <a:spAutoFit/>
+          </a:bodyPr>
+          <a:lstStyle/>
+          <a:p>
+            <a:pPr algn="ctr"/>
+            <a:r>
+              <a:rPr sz="4800" b="1" i="0">
                 <a:solidFill>
                   <a:srgbClr val="FFFFFF"/>
                 </a:solidFill>
@@ -6397,99 +6117,29 @@
         </p:nvSpPr>
         <p:spPr>
           <a:xfrm>
-            <a:off x="594360" y="2980944"/>
-            <a:ext cx="11002975" cy="347472"/>
-          </a:xfrm>
-          <a:prstGeom prst="rect">
-            <a:avLst/>
-          </a:prstGeom>
-          <a:noFill/>
-        </p:spPr>
-        <p:txBody>
-          <a:bodyPr wrap="square">
-            <a:spAutoFit/>
-          </a:bodyPr>
-          <a:lstStyle/>
-          <a:p>
-            <a:pPr algn="ctr"/>
-            <a:r>
-              <a:rPr sz="2200" b="0" i="1">
-                <a:solidFill>
-                  <a:srgbClr val="8C8C8C"/>
-                </a:solidFill>
-                <a:latin typeface="Arial"/>
-              </a:rPr>
-              <a:t/>
-            </a:r>
-          </a:p>
-        </p:txBody>
-      </p:sp>
-      <p:sp>
-        <p:nvSpPr>
-          <p:cNvPr id="4" name="TextBox 3"/>
-          <p:cNvSpPr txBox="1"/>
-          <p:nvPr/>
-        </p:nvSpPr>
-        <p:spPr>
-          <a:xfrm>
-            <a:off x="594360" y="3529584"/>
-            <a:ext cx="11002975" cy="685800"/>
-          </a:xfrm>
-          <a:prstGeom prst="rect">
-            <a:avLst/>
-          </a:prstGeom>
-          <a:noFill/>
-        </p:spPr>
-        <p:txBody>
-          <a:bodyPr wrap="square">
-            <a:spAutoFit/>
-          </a:bodyPr>
-          <a:lstStyle/>
-          <a:p>
-            <a:pPr algn="ctr"/>
-            <a:r>
-              <a:rPr sz="4400" b="1" i="0">
+            <a:off x="640080" y="2985516"/>
+            <a:ext cx="10911535" cy="731520"/>
+          </a:xfrm>
+          <a:prstGeom prst="rect">
+            <a:avLst/>
+          </a:prstGeom>
+          <a:noFill/>
+        </p:spPr>
+        <p:txBody>
+          <a:bodyPr wrap="square">
+            <a:spAutoFit/>
+          </a:bodyPr>
+          <a:lstStyle/>
+          <a:p>
+            <a:pPr algn="ctr"/>
+            <a:r>
+              <a:rPr sz="4800" b="1" i="0">
                 <a:solidFill>
                   <a:srgbClr val="FFFFFF"/>
                 </a:solidFill>
                 <a:latin typeface="Arial"/>
               </a:rPr>
               <a:t>Sua misericórdia é mais</a:t>
-            </a:r>
-          </a:p>
-        </p:txBody>
-      </p:sp>
-      <p:sp>
-        <p:nvSpPr>
-          <p:cNvPr id="5" name="TextBox 4"/>
-          <p:cNvSpPr txBox="1"/>
-          <p:nvPr/>
-        </p:nvSpPr>
-        <p:spPr>
-          <a:xfrm>
-            <a:off x="594360" y="4251960"/>
-            <a:ext cx="11002975" cy="347472"/>
-          </a:xfrm>
-          <a:prstGeom prst="rect">
-            <a:avLst/>
-          </a:prstGeom>
-          <a:noFill/>
-        </p:spPr>
-        <p:txBody>
-          <a:bodyPr wrap="square">
-            <a:spAutoFit/>
-          </a:bodyPr>
-          <a:lstStyle/>
-          <a:p>
-            <a:pPr algn="ctr"/>
-            <a:r>
-              <a:rPr sz="2200" b="0" i="1">
-                <a:solidFill>
-                  <a:srgbClr val="8C8C8C"/>
-                </a:solidFill>
-                <a:latin typeface="Arial"/>
-              </a:rPr>
-              <a:t/>
             </a:r>
           </a:p>
         </p:txBody>
@@ -6528,23 +6178,23 @@
         </p:nvSpPr>
         <p:spPr>
           <a:xfrm>
-            <a:off x="594360" y="2258568"/>
-            <a:ext cx="11002975" cy="685800"/>
-          </a:xfrm>
-          <a:prstGeom prst="rect">
-            <a:avLst/>
-          </a:prstGeom>
-          <a:noFill/>
-        </p:spPr>
-        <p:txBody>
-          <a:bodyPr wrap="square">
-            <a:spAutoFit/>
-          </a:bodyPr>
-          <a:lstStyle/>
-          <a:p>
-            <a:pPr algn="ctr"/>
-            <a:r>
-              <a:rPr sz="4400" b="1" i="0">
+            <a:off x="640080" y="2052828"/>
+            <a:ext cx="10911535" cy="731520"/>
+          </a:xfrm>
+          <a:prstGeom prst="rect">
+            <a:avLst/>
+          </a:prstGeom>
+          <a:noFill/>
+        </p:spPr>
+        <p:txBody>
+          <a:bodyPr wrap="square">
+            <a:spAutoFit/>
+          </a:bodyPr>
+          <a:lstStyle/>
+          <a:p>
+            <a:pPr algn="ctr"/>
+            <a:r>
+              <a:rPr sz="4800" b="1" i="0">
                 <a:solidFill>
                   <a:srgbClr val="FFFFFF"/>
                 </a:solidFill>
@@ -6563,99 +6213,29 @@
         </p:nvSpPr>
         <p:spPr>
           <a:xfrm>
-            <a:off x="594360" y="2980944"/>
-            <a:ext cx="11002975" cy="347472"/>
-          </a:xfrm>
-          <a:prstGeom prst="rect">
-            <a:avLst/>
-          </a:prstGeom>
-          <a:noFill/>
-        </p:spPr>
-        <p:txBody>
-          <a:bodyPr wrap="square">
-            <a:spAutoFit/>
-          </a:bodyPr>
-          <a:lstStyle/>
-          <a:p>
-            <a:pPr algn="ctr"/>
-            <a:r>
-              <a:rPr sz="2200" b="0" i="1">
-                <a:solidFill>
-                  <a:srgbClr val="8C8C8C"/>
-                </a:solidFill>
-                <a:latin typeface="Arial"/>
-              </a:rPr>
-              <a:t/>
-            </a:r>
-          </a:p>
-        </p:txBody>
-      </p:sp>
-      <p:sp>
-        <p:nvSpPr>
-          <p:cNvPr id="4" name="TextBox 3"/>
-          <p:cNvSpPr txBox="1"/>
-          <p:nvPr/>
-        </p:nvSpPr>
-        <p:spPr>
-          <a:xfrm>
-            <a:off x="594360" y="3529584"/>
-            <a:ext cx="11002975" cy="685800"/>
-          </a:xfrm>
-          <a:prstGeom prst="rect">
-            <a:avLst/>
-          </a:prstGeom>
-          <a:noFill/>
-        </p:spPr>
-        <p:txBody>
-          <a:bodyPr wrap="square">
-            <a:spAutoFit/>
-          </a:bodyPr>
-          <a:lstStyle/>
-          <a:p>
-            <a:pPr algn="ctr"/>
-            <a:r>
-              <a:rPr sz="4400" b="1" i="0">
+            <a:off x="640080" y="2985516"/>
+            <a:ext cx="10911535" cy="731520"/>
+          </a:xfrm>
+          <a:prstGeom prst="rect">
+            <a:avLst/>
+          </a:prstGeom>
+          <a:noFill/>
+        </p:spPr>
+        <p:txBody>
+          <a:bodyPr wrap="square">
+            <a:spAutoFit/>
+          </a:bodyPr>
+          <a:lstStyle/>
+          <a:p>
+            <a:pPr algn="ctr"/>
+            <a:r>
+              <a:rPr sz="4800" b="1" i="0">
                 <a:solidFill>
                   <a:srgbClr val="FFFFFF"/>
                 </a:solidFill>
                 <a:latin typeface="Arial"/>
               </a:rPr>
               <a:t>Que não desistisse de mim jamais</a:t>
-            </a:r>
-          </a:p>
-        </p:txBody>
-      </p:sp>
-      <p:sp>
-        <p:nvSpPr>
-          <p:cNvPr id="5" name="TextBox 4"/>
-          <p:cNvSpPr txBox="1"/>
-          <p:nvPr/>
-        </p:nvSpPr>
-        <p:spPr>
-          <a:xfrm>
-            <a:off x="594360" y="4251960"/>
-            <a:ext cx="11002975" cy="347472"/>
-          </a:xfrm>
-          <a:prstGeom prst="rect">
-            <a:avLst/>
-          </a:prstGeom>
-          <a:noFill/>
-        </p:spPr>
-        <p:txBody>
-          <a:bodyPr wrap="square">
-            <a:spAutoFit/>
-          </a:bodyPr>
-          <a:lstStyle/>
-          <a:p>
-            <a:pPr algn="ctr"/>
-            <a:r>
-              <a:rPr sz="2200" b="0" i="1">
-                <a:solidFill>
-                  <a:srgbClr val="8C8C8C"/>
-                </a:solidFill>
-                <a:latin typeface="Arial"/>
-              </a:rPr>
-              <a:t/>
             </a:r>
           </a:p>
         </p:txBody>
@@ -6694,23 +6274,23 @@
         </p:nvSpPr>
         <p:spPr>
           <a:xfrm>
-            <a:off x="594360" y="1837944"/>
-            <a:ext cx="11002975" cy="685800"/>
-          </a:xfrm>
-          <a:prstGeom prst="rect">
-            <a:avLst/>
-          </a:prstGeom>
-          <a:noFill/>
-        </p:spPr>
-        <p:txBody>
-          <a:bodyPr wrap="square">
-            <a:spAutoFit/>
-          </a:bodyPr>
-          <a:lstStyle/>
-          <a:p>
-            <a:pPr algn="ctr"/>
-            <a:r>
-              <a:rPr sz="4400" b="1" i="0">
+            <a:off x="640080" y="1650492"/>
+            <a:ext cx="10911535" cy="731520"/>
+          </a:xfrm>
+          <a:prstGeom prst="rect">
+            <a:avLst/>
+          </a:prstGeom>
+          <a:noFill/>
+        </p:spPr>
+        <p:txBody>
+          <a:bodyPr wrap="square">
+            <a:spAutoFit/>
+          </a:bodyPr>
+          <a:lstStyle/>
+          <a:p>
+            <a:pPr algn="ctr"/>
+            <a:r>
+              <a:rPr sz="4800" b="1" i="0">
                 <a:solidFill>
                   <a:srgbClr val="FFFFFF"/>
                 </a:solidFill>
@@ -6729,8 +6309,8 @@
         </p:nvSpPr>
         <p:spPr>
           <a:xfrm>
-            <a:off x="594360" y="2560320"/>
-            <a:ext cx="11002975" cy="384048"/>
+            <a:off x="640080" y="2418588"/>
+            <a:ext cx="10911535" cy="365760"/>
           </a:xfrm>
           <a:prstGeom prst="rect">
             <a:avLst/>
@@ -6747,7 +6327,7 @@
             <a:r>
               <a:rPr sz="2400" b="0" i="1">
                 <a:solidFill>
-                  <a:srgbClr val="B4B4B4"/>
+                  <a:srgbClr val="AAAAAA"/>
                 </a:solidFill>
                 <a:latin typeface="Arial"/>
               </a:rPr>
@@ -6764,8 +6344,78 @@
         </p:nvSpPr>
         <p:spPr>
           <a:xfrm>
-            <a:off x="594360" y="2980944"/>
-            <a:ext cx="11002975" cy="347472"/>
+            <a:off x="640080" y="2985516"/>
+            <a:ext cx="10911535" cy="731520"/>
+          </a:xfrm>
+          <a:prstGeom prst="rect">
+            <a:avLst/>
+          </a:prstGeom>
+          <a:noFill/>
+        </p:spPr>
+        <p:txBody>
+          <a:bodyPr wrap="square">
+            <a:spAutoFit/>
+          </a:bodyPr>
+          <a:lstStyle/>
+          <a:p>
+            <a:pPr algn="ctr"/>
+            <a:r>
+              <a:rPr sz="4800" b="1" i="0">
+                <a:solidFill>
+                  <a:srgbClr val="FFFFFF"/>
+                </a:solidFill>
+                <a:latin typeface="Arial"/>
+              </a:rPr>
+              <a:t>わ  れらの   全   て    の罪と</a:t>
+            </a:r>
+          </a:p>
+        </p:txBody>
+      </p:sp>
+      <p:sp>
+        <p:nvSpPr>
+          <p:cNvPr id="5" name="TextBox 4"/>
+          <p:cNvSpPr txBox="1"/>
+          <p:nvPr/>
+        </p:nvSpPr>
+        <p:spPr>
+          <a:xfrm>
+            <a:off x="640080" y="3753612"/>
+            <a:ext cx="10911535" cy="365760"/>
+          </a:xfrm>
+          <a:prstGeom prst="rect">
+            <a:avLst/>
+          </a:prstGeom>
+          <a:noFill/>
+        </p:spPr>
+        <p:txBody>
+          <a:bodyPr wrap="square">
+            <a:spAutoFit/>
+          </a:bodyPr>
+          <a:lstStyle/>
+          <a:p>
+            <a:pPr algn="ctr"/>
+            <a:r>
+              <a:rPr sz="2400" b="0" i="1">
+                <a:solidFill>
+                  <a:srgbClr val="AAAAAA"/>
+                </a:solidFill>
+                <a:latin typeface="Arial"/>
+              </a:rPr>
+              <a:t>wa rerano   subete notsumito</a:t>
+            </a:r>
+          </a:p>
+        </p:txBody>
+      </p:sp>
+      <p:sp>
+        <p:nvSpPr>
+          <p:cNvPr id="6" name="TextBox 5"/>
+          <p:cNvSpPr txBox="1"/>
+          <p:nvPr/>
+        </p:nvSpPr>
+        <p:spPr>
+          <a:xfrm>
+            <a:off x="640080" y="4530852"/>
+            <a:ext cx="10911535" cy="310896"/>
           </a:xfrm>
           <a:prstGeom prst="rect">
             <a:avLst/>
@@ -6782,7 +6432,7 @@
             <a:r>
               <a:rPr sz="2000" b="0" i="1">
                 <a:solidFill>
-                  <a:srgbClr val="8C8C8C"/>
+                  <a:srgbClr val="828282"/>
                 </a:solidFill>
                 <a:latin typeface="Arial"/>
               </a:rPr>
@@ -6793,84 +6443,14 @@
       </p:sp>
       <p:sp>
         <p:nvSpPr>
-          <p:cNvPr id="5" name="TextBox 4"/>
-          <p:cNvSpPr txBox="1"/>
-          <p:nvPr/>
-        </p:nvSpPr>
-        <p:spPr>
-          <a:xfrm>
-            <a:off x="594360" y="3529584"/>
-            <a:ext cx="11002975" cy="685800"/>
-          </a:xfrm>
-          <a:prstGeom prst="rect">
-            <a:avLst/>
-          </a:prstGeom>
-          <a:noFill/>
-        </p:spPr>
-        <p:txBody>
-          <a:bodyPr wrap="square">
-            <a:spAutoFit/>
-          </a:bodyPr>
-          <a:lstStyle/>
-          <a:p>
-            <a:pPr algn="ctr"/>
-            <a:r>
-              <a:rPr sz="4400" b="1" i="0">
-                <a:solidFill>
-                  <a:srgbClr val="FFFFFF"/>
-                </a:solidFill>
-                <a:latin typeface="Arial"/>
-              </a:rPr>
-              <a:t>わ  れらの   全   て    の罪と</a:t>
-            </a:r>
-          </a:p>
-        </p:txBody>
-      </p:sp>
-      <p:sp>
-        <p:nvSpPr>
-          <p:cNvPr id="6" name="TextBox 5"/>
-          <p:cNvSpPr txBox="1"/>
-          <p:nvPr/>
-        </p:nvSpPr>
-        <p:spPr>
-          <a:xfrm>
-            <a:off x="594360" y="4251960"/>
-            <a:ext cx="11002975" cy="384048"/>
-          </a:xfrm>
-          <a:prstGeom prst="rect">
-            <a:avLst/>
-          </a:prstGeom>
-          <a:noFill/>
-        </p:spPr>
-        <p:txBody>
-          <a:bodyPr wrap="square">
-            <a:spAutoFit/>
-          </a:bodyPr>
-          <a:lstStyle/>
-          <a:p>
-            <a:pPr algn="ctr"/>
-            <a:r>
-              <a:rPr sz="2400" b="0" i="1">
-                <a:solidFill>
-                  <a:srgbClr val="B4B4B4"/>
-                </a:solidFill>
-                <a:latin typeface="Arial"/>
-              </a:rPr>
-              <a:t>wa rerano   subete notsumito</a:t>
-            </a:r>
-          </a:p>
-        </p:txBody>
-      </p:sp>
-      <p:sp>
-        <p:nvSpPr>
           <p:cNvPr id="7" name="TextBox 6"/>
           <p:cNvSpPr txBox="1"/>
           <p:nvPr/>
         </p:nvSpPr>
         <p:spPr>
           <a:xfrm>
-            <a:off x="594360" y="4672584"/>
-            <a:ext cx="11002975" cy="347472"/>
+            <a:off x="640080" y="4896612"/>
+            <a:ext cx="10911535" cy="310896"/>
           </a:xfrm>
           <a:prstGeom prst="rect">
             <a:avLst/>
@@ -6887,7 +6467,7 @@
             <a:r>
               <a:rPr sz="2000" b="0" i="1">
                 <a:solidFill>
-                  <a:srgbClr val="8C8C8C"/>
+                  <a:srgbClr val="828282"/>
                 </a:solidFill>
                 <a:latin typeface="Arial"/>
               </a:rPr>
@@ -6930,23 +6510,23 @@
         </p:nvSpPr>
         <p:spPr>
           <a:xfrm>
-            <a:off x="594360" y="1837944"/>
-            <a:ext cx="11002975" cy="685800"/>
-          </a:xfrm>
-          <a:prstGeom prst="rect">
-            <a:avLst/>
-          </a:prstGeom>
-          <a:noFill/>
-        </p:spPr>
-        <p:txBody>
-          <a:bodyPr wrap="square">
-            <a:spAutoFit/>
-          </a:bodyPr>
-          <a:lstStyle/>
-          <a:p>
-            <a:pPr algn="ctr"/>
-            <a:r>
-              <a:rPr sz="4400" b="1" i="0">
+            <a:off x="640080" y="1650492"/>
+            <a:ext cx="10911535" cy="731520"/>
+          </a:xfrm>
+          <a:prstGeom prst="rect">
+            <a:avLst/>
+          </a:prstGeom>
+          <a:noFill/>
+        </p:spPr>
+        <p:txBody>
+          <a:bodyPr wrap="square">
+            <a:spAutoFit/>
+          </a:bodyPr>
+          <a:lstStyle/>
+          <a:p>
+            <a:pPr algn="ctr"/>
+            <a:r>
+              <a:rPr sz="4800" b="1" i="0">
                 <a:solidFill>
                   <a:srgbClr val="FFFFFF"/>
                 </a:solidFill>
@@ -6965,8 +6545,8 @@
         </p:nvSpPr>
         <p:spPr>
           <a:xfrm>
-            <a:off x="594360" y="2560320"/>
-            <a:ext cx="11002975" cy="384048"/>
+            <a:off x="640080" y="2418588"/>
+            <a:ext cx="10911535" cy="365760"/>
           </a:xfrm>
           <a:prstGeom prst="rect">
             <a:avLst/>
@@ -6983,7 +6563,7 @@
             <a:r>
               <a:rPr sz="2400" b="0" i="1">
                 <a:solidFill>
-                  <a:srgbClr val="B4B4B4"/>
+                  <a:srgbClr val="AAAAAA"/>
                 </a:solidFill>
                 <a:latin typeface="Arial"/>
               </a:rPr>
@@ -7000,8 +6580,78 @@
         </p:nvSpPr>
         <p:spPr>
           <a:xfrm>
-            <a:off x="594360" y="2980944"/>
-            <a:ext cx="11002975" cy="347472"/>
+            <a:off x="640080" y="2985516"/>
+            <a:ext cx="10911535" cy="731520"/>
+          </a:xfrm>
+          <a:prstGeom prst="rect">
+            <a:avLst/>
+          </a:prstGeom>
+          <a:noFill/>
+        </p:spPr>
+        <p:txBody>
+          <a:bodyPr wrap="square">
+            <a:spAutoFit/>
+          </a:bodyPr>
+          <a:lstStyle/>
+          <a:p>
+            <a:pPr algn="ctr"/>
+            <a:r>
+              <a:rPr sz="4800" b="1" i="0">
+                <a:solidFill>
+                  <a:srgbClr val="FFFFFF"/>
+                </a:solidFill>
+                <a:latin typeface="Arial"/>
+              </a:rPr>
+              <a:t>つみより深いあわれみ</a:t>
+            </a:r>
+          </a:p>
+        </p:txBody>
+      </p:sp>
+      <p:sp>
+        <p:nvSpPr>
+          <p:cNvPr id="5" name="TextBox 4"/>
+          <p:cNvSpPr txBox="1"/>
+          <p:nvPr/>
+        </p:nvSpPr>
+        <p:spPr>
+          <a:xfrm>
+            <a:off x="640080" y="3753612"/>
+            <a:ext cx="10911535" cy="365760"/>
+          </a:xfrm>
+          <a:prstGeom prst="rect">
+            <a:avLst/>
+          </a:prstGeom>
+          <a:noFill/>
+        </p:spPr>
+        <p:txBody>
+          <a:bodyPr wrap="square">
+            <a:spAutoFit/>
+          </a:bodyPr>
+          <a:lstStyle/>
+          <a:p>
+            <a:pPr algn="ctr"/>
+            <a:r>
+              <a:rPr sz="2400" b="0" i="1">
+                <a:solidFill>
+                  <a:srgbClr val="AAAAAA"/>
+                </a:solidFill>
+                <a:latin typeface="Arial"/>
+              </a:rPr>
+              <a:t>tsumi    yori fukai awaremi</a:t>
+            </a:r>
+          </a:p>
+        </p:txBody>
+      </p:sp>
+      <p:sp>
+        <p:nvSpPr>
+          <p:cNvPr id="6" name="TextBox 5"/>
+          <p:cNvSpPr txBox="1"/>
+          <p:nvPr/>
+        </p:nvSpPr>
+        <p:spPr>
+          <a:xfrm>
+            <a:off x="640080" y="4530852"/>
+            <a:ext cx="10911535" cy="310896"/>
           </a:xfrm>
           <a:prstGeom prst="rect">
             <a:avLst/>
@@ -7018,7 +6668,7 @@
             <a:r>
               <a:rPr sz="2000" b="0" i="1">
                 <a:solidFill>
-                  <a:srgbClr val="8C8C8C"/>
+                  <a:srgbClr val="828282"/>
                 </a:solidFill>
                 <a:latin typeface="Arial"/>
               </a:rPr>
@@ -7029,84 +6679,14 @@
       </p:sp>
       <p:sp>
         <p:nvSpPr>
-          <p:cNvPr id="5" name="TextBox 4"/>
-          <p:cNvSpPr txBox="1"/>
-          <p:nvPr/>
-        </p:nvSpPr>
-        <p:spPr>
-          <a:xfrm>
-            <a:off x="594360" y="3529584"/>
-            <a:ext cx="11002975" cy="685800"/>
-          </a:xfrm>
-          <a:prstGeom prst="rect">
-            <a:avLst/>
-          </a:prstGeom>
-          <a:noFill/>
-        </p:spPr>
-        <p:txBody>
-          <a:bodyPr wrap="square">
-            <a:spAutoFit/>
-          </a:bodyPr>
-          <a:lstStyle/>
-          <a:p>
-            <a:pPr algn="ctr"/>
-            <a:r>
-              <a:rPr sz="4400" b="1" i="0">
-                <a:solidFill>
-                  <a:srgbClr val="FFFFFF"/>
-                </a:solidFill>
-                <a:latin typeface="Arial"/>
-              </a:rPr>
-              <a:t>つみより深いあわれみ</a:t>
-            </a:r>
-          </a:p>
-        </p:txBody>
-      </p:sp>
-      <p:sp>
-        <p:nvSpPr>
-          <p:cNvPr id="6" name="TextBox 5"/>
-          <p:cNvSpPr txBox="1"/>
-          <p:nvPr/>
-        </p:nvSpPr>
-        <p:spPr>
-          <a:xfrm>
-            <a:off x="594360" y="4251960"/>
-            <a:ext cx="11002975" cy="384048"/>
-          </a:xfrm>
-          <a:prstGeom prst="rect">
-            <a:avLst/>
-          </a:prstGeom>
-          <a:noFill/>
-        </p:spPr>
-        <p:txBody>
-          <a:bodyPr wrap="square">
-            <a:spAutoFit/>
-          </a:bodyPr>
-          <a:lstStyle/>
-          <a:p>
-            <a:pPr algn="ctr"/>
-            <a:r>
-              <a:rPr sz="2400" b="0" i="1">
-                <a:solidFill>
-                  <a:srgbClr val="B4B4B4"/>
-                </a:solidFill>
-                <a:latin typeface="Arial"/>
-              </a:rPr>
-              <a:t>tsumi    yori fukai awaremi</a:t>
-            </a:r>
-          </a:p>
-        </p:txBody>
-      </p:sp>
-      <p:sp>
-        <p:nvSpPr>
           <p:cNvPr id="7" name="TextBox 6"/>
           <p:cNvSpPr txBox="1"/>
           <p:nvPr/>
         </p:nvSpPr>
         <p:spPr>
           <a:xfrm>
-            <a:off x="594360" y="4672584"/>
-            <a:ext cx="11002975" cy="347472"/>
+            <a:off x="640080" y="4896612"/>
+            <a:ext cx="10911535" cy="310896"/>
           </a:xfrm>
           <a:prstGeom prst="rect">
             <a:avLst/>
@@ -7123,7 +6703,7 @@
             <a:r>
               <a:rPr sz="2000" b="0" i="1">
                 <a:solidFill>
-                  <a:srgbClr val="8C8C8C"/>
+                  <a:srgbClr val="828282"/>
                 </a:solidFill>
                 <a:latin typeface="Arial"/>
               </a:rPr>
@@ -7166,23 +6746,23 @@
         </p:nvSpPr>
         <p:spPr>
           <a:xfrm>
-            <a:off x="594360" y="2258568"/>
-            <a:ext cx="11002975" cy="685800"/>
-          </a:xfrm>
-          <a:prstGeom prst="rect">
-            <a:avLst/>
-          </a:prstGeom>
-          <a:noFill/>
-        </p:spPr>
-        <p:txBody>
-          <a:bodyPr wrap="square">
-            <a:spAutoFit/>
-          </a:bodyPr>
-          <a:lstStyle/>
-          <a:p>
-            <a:pPr algn="ctr"/>
-            <a:r>
-              <a:rPr sz="4400" b="1" i="0">
+            <a:off x="640080" y="2052828"/>
+            <a:ext cx="10911535" cy="731520"/>
+          </a:xfrm>
+          <a:prstGeom prst="rect">
+            <a:avLst/>
+          </a:prstGeom>
+          <a:noFill/>
+        </p:spPr>
+        <p:txBody>
+          <a:bodyPr wrap="square">
+            <a:spAutoFit/>
+          </a:bodyPr>
+          <a:lstStyle/>
+          <a:p>
+            <a:pPr algn="ctr"/>
+            <a:r>
+              <a:rPr sz="4800" b="1" i="0">
                 <a:solidFill>
                   <a:srgbClr val="FFFFFF"/>
                 </a:solidFill>
@@ -7201,25 +6781,60 @@
         </p:nvSpPr>
         <p:spPr>
           <a:xfrm>
-            <a:off x="594360" y="2980944"/>
-            <a:ext cx="11002975" cy="347472"/>
-          </a:xfrm>
-          <a:prstGeom prst="rect">
-            <a:avLst/>
-          </a:prstGeom>
-          <a:noFill/>
-        </p:spPr>
-        <p:txBody>
-          <a:bodyPr wrap="square">
-            <a:spAutoFit/>
-          </a:bodyPr>
-          <a:lstStyle/>
-          <a:p>
-            <a:pPr algn="ctr"/>
-            <a:r>
-              <a:rPr sz="2200" b="0" i="1">
-                <a:solidFill>
-                  <a:srgbClr val="8C8C8C"/>
+            <a:off x="640080" y="2985516"/>
+            <a:ext cx="10911535" cy="731520"/>
+          </a:xfrm>
+          <a:prstGeom prst="rect">
+            <a:avLst/>
+          </a:prstGeom>
+          <a:noFill/>
+        </p:spPr>
+        <p:txBody>
+          <a:bodyPr wrap="square">
+            <a:spAutoFit/>
+          </a:bodyPr>
+          <a:lstStyle/>
+          <a:p>
+            <a:pPr algn="ctr"/>
+            <a:r>
+              <a:rPr sz="4800" b="1" i="0">
+                <a:solidFill>
+                  <a:srgbClr val="FFFFFF"/>
+                </a:solidFill>
+                <a:latin typeface="Arial"/>
+              </a:rPr>
+              <a:t>Sua misericórdia é mais</a:t>
+            </a:r>
+          </a:p>
+        </p:txBody>
+      </p:sp>
+      <p:sp>
+        <p:nvSpPr>
+          <p:cNvPr id="4" name="TextBox 3"/>
+          <p:cNvSpPr txBox="1"/>
+          <p:nvPr/>
+        </p:nvSpPr>
+        <p:spPr>
+          <a:xfrm>
+            <a:off x="640080" y="4128516"/>
+            <a:ext cx="10911535" cy="310896"/>
+          </a:xfrm>
+          <a:prstGeom prst="rect">
+            <a:avLst/>
+          </a:prstGeom>
+          <a:noFill/>
+        </p:spPr>
+        <p:txBody>
+          <a:bodyPr wrap="square">
+            <a:spAutoFit/>
+          </a:bodyPr>
+          <a:lstStyle/>
+          <a:p>
+            <a:pPr algn="ctr"/>
+            <a:r>
+              <a:rPr sz="2000" b="0" i="0">
+                <a:solidFill>
+                  <a:srgbClr val="828282"/>
                 </a:solidFill>
                 <a:latin typeface="Arial"/>
               </a:rPr>
@@ -7230,66 +6845,31 @@
       </p:sp>
       <p:sp>
         <p:nvSpPr>
-          <p:cNvPr id="4" name="TextBox 3"/>
-          <p:cNvSpPr txBox="1"/>
-          <p:nvPr/>
-        </p:nvSpPr>
-        <p:spPr>
-          <a:xfrm>
-            <a:off x="594360" y="3529584"/>
-            <a:ext cx="11002975" cy="685800"/>
-          </a:xfrm>
-          <a:prstGeom prst="rect">
-            <a:avLst/>
-          </a:prstGeom>
-          <a:noFill/>
-        </p:spPr>
-        <p:txBody>
-          <a:bodyPr wrap="square">
-            <a:spAutoFit/>
-          </a:bodyPr>
-          <a:lstStyle/>
-          <a:p>
-            <a:pPr algn="ctr"/>
-            <a:r>
-              <a:rPr sz="4400" b="1" i="0">
-                <a:solidFill>
-                  <a:srgbClr val="FFFFFF"/>
-                </a:solidFill>
-                <a:latin typeface="Arial"/>
-              </a:rPr>
-              <a:t>Sua misericórdia é mais</a:t>
-            </a:r>
-          </a:p>
-        </p:txBody>
-      </p:sp>
-      <p:sp>
-        <p:nvSpPr>
           <p:cNvPr id="5" name="TextBox 4"/>
           <p:cNvSpPr txBox="1"/>
           <p:nvPr/>
         </p:nvSpPr>
         <p:spPr>
           <a:xfrm>
-            <a:off x="594360" y="4251960"/>
-            <a:ext cx="11002975" cy="347472"/>
-          </a:xfrm>
-          <a:prstGeom prst="rect">
-            <a:avLst/>
-          </a:prstGeom>
-          <a:noFill/>
-        </p:spPr>
-        <p:txBody>
-          <a:bodyPr wrap="square">
-            <a:spAutoFit/>
-          </a:bodyPr>
-          <a:lstStyle/>
-          <a:p>
-            <a:pPr algn="ctr"/>
-            <a:r>
-              <a:rPr sz="2200" b="0" i="1">
-                <a:solidFill>
-                  <a:srgbClr val="8C8C8C"/>
+            <a:off x="640080" y="4494276"/>
+            <a:ext cx="10911535" cy="310896"/>
+          </a:xfrm>
+          <a:prstGeom prst="rect">
+            <a:avLst/>
+          </a:prstGeom>
+          <a:noFill/>
+        </p:spPr>
+        <p:txBody>
+          <a:bodyPr wrap="square">
+            <a:spAutoFit/>
+          </a:bodyPr>
+          <a:lstStyle/>
+          <a:p>
+            <a:pPr algn="ctr"/>
+            <a:r>
+              <a:rPr sz="2000" b="0" i="0">
+                <a:solidFill>
+                  <a:srgbClr val="828282"/>
                 </a:solidFill>
                 <a:latin typeface="Arial"/>
               </a:rPr>
@@ -7332,23 +6912,23 @@
         </p:nvSpPr>
         <p:spPr>
           <a:xfrm>
-            <a:off x="594360" y="2258568"/>
-            <a:ext cx="11002975" cy="685800"/>
-          </a:xfrm>
-          <a:prstGeom prst="rect">
-            <a:avLst/>
-          </a:prstGeom>
-          <a:noFill/>
-        </p:spPr>
-        <p:txBody>
-          <a:bodyPr wrap="square">
-            <a:spAutoFit/>
-          </a:bodyPr>
-          <a:lstStyle/>
-          <a:p>
-            <a:pPr algn="ctr"/>
-            <a:r>
-              <a:rPr sz="4400" b="1" i="0">
+            <a:off x="640080" y="2052828"/>
+            <a:ext cx="10911535" cy="731520"/>
+          </a:xfrm>
+          <a:prstGeom prst="rect">
+            <a:avLst/>
+          </a:prstGeom>
+          <a:noFill/>
+        </p:spPr>
+        <p:txBody>
+          <a:bodyPr wrap="square">
+            <a:spAutoFit/>
+          </a:bodyPr>
+          <a:lstStyle/>
+          <a:p>
+            <a:pPr algn="ctr"/>
+            <a:r>
+              <a:rPr sz="4800" b="1" i="0">
                 <a:solidFill>
                   <a:srgbClr val="FFFFFF"/>
                 </a:solidFill>
@@ -7367,25 +6947,60 @@
         </p:nvSpPr>
         <p:spPr>
           <a:xfrm>
-            <a:off x="594360" y="2980944"/>
-            <a:ext cx="11002975" cy="347472"/>
-          </a:xfrm>
-          <a:prstGeom prst="rect">
-            <a:avLst/>
-          </a:prstGeom>
-          <a:noFill/>
-        </p:spPr>
-        <p:txBody>
-          <a:bodyPr wrap="square">
-            <a:spAutoFit/>
-          </a:bodyPr>
-          <a:lstStyle/>
-          <a:p>
-            <a:pPr algn="ctr"/>
-            <a:r>
-              <a:rPr sz="2200" b="0" i="1">
-                <a:solidFill>
-                  <a:srgbClr val="8C8C8C"/>
+            <a:off x="640080" y="2985516"/>
+            <a:ext cx="10911535" cy="731520"/>
+          </a:xfrm>
+          <a:prstGeom prst="rect">
+            <a:avLst/>
+          </a:prstGeom>
+          <a:noFill/>
+        </p:spPr>
+        <p:txBody>
+          <a:bodyPr wrap="square">
+            <a:spAutoFit/>
+          </a:bodyPr>
+          <a:lstStyle/>
+          <a:p>
+            <a:pPr algn="ctr"/>
+            <a:r>
+              <a:rPr sz="4800" b="1" i="0">
+                <a:solidFill>
+                  <a:srgbClr val="FFFFFF"/>
+                </a:solidFill>
+                <a:latin typeface="Arial"/>
+              </a:rPr>
+              <a:t>Graça que não se pode medir</a:t>
+            </a:r>
+          </a:p>
+        </p:txBody>
+      </p:sp>
+      <p:sp>
+        <p:nvSpPr>
+          <p:cNvPr id="4" name="TextBox 3"/>
+          <p:cNvSpPr txBox="1"/>
+          <p:nvPr/>
+        </p:nvSpPr>
+        <p:spPr>
+          <a:xfrm>
+            <a:off x="640080" y="4128516"/>
+            <a:ext cx="10911535" cy="310896"/>
+          </a:xfrm>
+          <a:prstGeom prst="rect">
+            <a:avLst/>
+          </a:prstGeom>
+          <a:noFill/>
+        </p:spPr>
+        <p:txBody>
+          <a:bodyPr wrap="square">
+            <a:spAutoFit/>
+          </a:bodyPr>
+          <a:lstStyle/>
+          <a:p>
+            <a:pPr algn="ctr"/>
+            <a:r>
+              <a:rPr sz="2000" b="0" i="0">
+                <a:solidFill>
+                  <a:srgbClr val="828282"/>
                 </a:solidFill>
                 <a:latin typeface="Arial"/>
               </a:rPr>
@@ -7396,66 +7011,31 @@
       </p:sp>
       <p:sp>
         <p:nvSpPr>
-          <p:cNvPr id="4" name="TextBox 3"/>
-          <p:cNvSpPr txBox="1"/>
-          <p:nvPr/>
-        </p:nvSpPr>
-        <p:spPr>
-          <a:xfrm>
-            <a:off x="594360" y="3529584"/>
-            <a:ext cx="11002975" cy="685800"/>
-          </a:xfrm>
-          <a:prstGeom prst="rect">
-            <a:avLst/>
-          </a:prstGeom>
-          <a:noFill/>
-        </p:spPr>
-        <p:txBody>
-          <a:bodyPr wrap="square">
-            <a:spAutoFit/>
-          </a:bodyPr>
-          <a:lstStyle/>
-          <a:p>
-            <a:pPr algn="ctr"/>
-            <a:r>
-              <a:rPr sz="4400" b="1" i="0">
-                <a:solidFill>
-                  <a:srgbClr val="FFFFFF"/>
-                </a:solidFill>
-                <a:latin typeface="Arial"/>
-              </a:rPr>
-              <a:t>Graça que não se pode medir</a:t>
-            </a:r>
-          </a:p>
-        </p:txBody>
-      </p:sp>
-      <p:sp>
-        <p:nvSpPr>
           <p:cNvPr id="5" name="TextBox 4"/>
           <p:cNvSpPr txBox="1"/>
           <p:nvPr/>
         </p:nvSpPr>
         <p:spPr>
           <a:xfrm>
-            <a:off x="594360" y="4251960"/>
-            <a:ext cx="11002975" cy="347472"/>
-          </a:xfrm>
-          <a:prstGeom prst="rect">
-            <a:avLst/>
-          </a:prstGeom>
-          <a:noFill/>
-        </p:spPr>
-        <p:txBody>
-          <a:bodyPr wrap="square">
-            <a:spAutoFit/>
-          </a:bodyPr>
-          <a:lstStyle/>
-          <a:p>
-            <a:pPr algn="ctr"/>
-            <a:r>
-              <a:rPr sz="2200" b="0" i="1">
-                <a:solidFill>
-                  <a:srgbClr val="8C8C8C"/>
+            <a:off x="640080" y="4494276"/>
+            <a:ext cx="10911535" cy="310896"/>
+          </a:xfrm>
+          <a:prstGeom prst="rect">
+            <a:avLst/>
+          </a:prstGeom>
+          <a:noFill/>
+        </p:spPr>
+        <p:txBody>
+          <a:bodyPr wrap="square">
+            <a:spAutoFit/>
+          </a:bodyPr>
+          <a:lstStyle/>
+          <a:p>
+            <a:pPr algn="ctr"/>
+            <a:r>
+              <a:rPr sz="2000" b="0" i="0">
+                <a:solidFill>
+                  <a:srgbClr val="828282"/>
                 </a:solidFill>
                 <a:latin typeface="Arial"/>
               </a:rPr>
@@ -7498,64 +7078,29 @@
         </p:nvSpPr>
         <p:spPr>
           <a:xfrm>
-            <a:off x="594360" y="2894076"/>
-            <a:ext cx="11002975" cy="685800"/>
-          </a:xfrm>
-          <a:prstGeom prst="rect">
-            <a:avLst/>
-          </a:prstGeom>
-          <a:noFill/>
-        </p:spPr>
-        <p:txBody>
-          <a:bodyPr wrap="square">
-            <a:spAutoFit/>
-          </a:bodyPr>
-          <a:lstStyle/>
-          <a:p>
-            <a:pPr algn="ctr"/>
-            <a:r>
-              <a:rPr sz="4400" b="1" i="0">
+            <a:off x="640080" y="2702052"/>
+            <a:ext cx="10911535" cy="731520"/>
+          </a:xfrm>
+          <a:prstGeom prst="rect">
+            <a:avLst/>
+          </a:prstGeom>
+          <a:noFill/>
+        </p:spPr>
+        <p:txBody>
+          <a:bodyPr wrap="square">
+            <a:spAutoFit/>
+          </a:bodyPr>
+          <a:lstStyle/>
+          <a:p>
+            <a:pPr algn="ctr"/>
+            <a:r>
+              <a:rPr sz="4800" b="1" i="0">
                 <a:solidFill>
                   <a:srgbClr val="FFFFFF"/>
                 </a:solidFill>
                 <a:latin typeface="Arial"/>
               </a:rPr>
               <a:t>O que eu não mereço</a:t>
-            </a:r>
-          </a:p>
-        </p:txBody>
-      </p:sp>
-      <p:sp>
-        <p:nvSpPr>
-          <p:cNvPr id="3" name="TextBox 2"/>
-          <p:cNvSpPr txBox="1"/>
-          <p:nvPr/>
-        </p:nvSpPr>
-        <p:spPr>
-          <a:xfrm>
-            <a:off x="594360" y="3616452"/>
-            <a:ext cx="11002975" cy="347472"/>
-          </a:xfrm>
-          <a:prstGeom prst="rect">
-            <a:avLst/>
-          </a:prstGeom>
-          <a:noFill/>
-        </p:spPr>
-        <p:txBody>
-          <a:bodyPr wrap="square">
-            <a:spAutoFit/>
-          </a:bodyPr>
-          <a:lstStyle/>
-          <a:p>
-            <a:pPr algn="ctr"/>
-            <a:r>
-              <a:rPr sz="2200" b="0" i="1">
-                <a:solidFill>
-                  <a:srgbClr val="8C8C8C"/>
-                </a:solidFill>
-                <a:latin typeface="Arial"/>
-              </a:rPr>
-              <a:t/>
             </a:r>
           </a:p>
         </p:txBody>
@@ -7594,23 +7139,23 @@
         </p:nvSpPr>
         <p:spPr>
           <a:xfrm>
-            <a:off x="594360" y="2258568"/>
-            <a:ext cx="11002975" cy="685800"/>
-          </a:xfrm>
-          <a:prstGeom prst="rect">
-            <a:avLst/>
-          </a:prstGeom>
-          <a:noFill/>
-        </p:spPr>
-        <p:txBody>
-          <a:bodyPr wrap="square">
-            <a:spAutoFit/>
-          </a:bodyPr>
-          <a:lstStyle/>
-          <a:p>
-            <a:pPr algn="ctr"/>
-            <a:r>
-              <a:rPr sz="4400" b="1" i="0">
+            <a:off x="640080" y="2052828"/>
+            <a:ext cx="10911535" cy="731520"/>
+          </a:xfrm>
+          <a:prstGeom prst="rect">
+            <a:avLst/>
+          </a:prstGeom>
+          <a:noFill/>
+        </p:spPr>
+        <p:txBody>
+          <a:bodyPr wrap="square">
+            <a:spAutoFit/>
+          </a:bodyPr>
+          <a:lstStyle/>
+          <a:p>
+            <a:pPr algn="ctr"/>
+            <a:r>
+              <a:rPr sz="4800" b="1" i="0">
                 <a:solidFill>
                   <a:srgbClr val="FFFFFF"/>
                 </a:solidFill>
@@ -7629,25 +7174,60 @@
         </p:nvSpPr>
         <p:spPr>
           <a:xfrm>
-            <a:off x="594360" y="2980944"/>
-            <a:ext cx="11002975" cy="347472"/>
-          </a:xfrm>
-          <a:prstGeom prst="rect">
-            <a:avLst/>
-          </a:prstGeom>
-          <a:noFill/>
-        </p:spPr>
-        <p:txBody>
-          <a:bodyPr wrap="square">
-            <a:spAutoFit/>
-          </a:bodyPr>
-          <a:lstStyle/>
-          <a:p>
-            <a:pPr algn="ctr"/>
-            <a:r>
-              <a:rPr sz="2200" b="0" i="1">
-                <a:solidFill>
-                  <a:srgbClr val="8C8C8C"/>
+            <a:off x="640080" y="2985516"/>
+            <a:ext cx="10911535" cy="731520"/>
+          </a:xfrm>
+          <a:prstGeom prst="rect">
+            <a:avLst/>
+          </a:prstGeom>
+          <a:noFill/>
+        </p:spPr>
+        <p:txBody>
+          <a:bodyPr wrap="square">
+            <a:spAutoFit/>
+          </a:bodyPr>
+          <a:lstStyle/>
+          <a:p>
+            <a:pPr algn="ctr"/>
+            <a:r>
+              <a:rPr sz="4800" b="1" i="0">
+                <a:solidFill>
+                  <a:srgbClr val="FFFFFF"/>
+                </a:solidFill>
+                <a:latin typeface="Arial"/>
+              </a:rPr>
+              <a:t>Nossos pecados são muitos</a:t>
+            </a:r>
+          </a:p>
+        </p:txBody>
+      </p:sp>
+      <p:sp>
+        <p:nvSpPr>
+          <p:cNvPr id="4" name="TextBox 3"/>
+          <p:cNvSpPr txBox="1"/>
+          <p:nvPr/>
+        </p:nvSpPr>
+        <p:spPr>
+          <a:xfrm>
+            <a:off x="640080" y="4128516"/>
+            <a:ext cx="10911535" cy="310896"/>
+          </a:xfrm>
+          <a:prstGeom prst="rect">
+            <a:avLst/>
+          </a:prstGeom>
+          <a:noFill/>
+        </p:spPr>
+        <p:txBody>
+          <a:bodyPr wrap="square">
+            <a:spAutoFit/>
+          </a:bodyPr>
+          <a:lstStyle/>
+          <a:p>
+            <a:pPr algn="ctr"/>
+            <a:r>
+              <a:rPr sz="2000" b="0" i="0">
+                <a:solidFill>
+                  <a:srgbClr val="828282"/>
                 </a:solidFill>
                 <a:latin typeface="Arial"/>
               </a:rPr>
@@ -7658,66 +7238,31 @@
       </p:sp>
       <p:sp>
         <p:nvSpPr>
-          <p:cNvPr id="4" name="TextBox 3"/>
-          <p:cNvSpPr txBox="1"/>
-          <p:nvPr/>
-        </p:nvSpPr>
-        <p:spPr>
-          <a:xfrm>
-            <a:off x="594360" y="3529584"/>
-            <a:ext cx="11002975" cy="685800"/>
-          </a:xfrm>
-          <a:prstGeom prst="rect">
-            <a:avLst/>
-          </a:prstGeom>
-          <a:noFill/>
-        </p:spPr>
-        <p:txBody>
-          <a:bodyPr wrap="square">
-            <a:spAutoFit/>
-          </a:bodyPr>
-          <a:lstStyle/>
-          <a:p>
-            <a:pPr algn="ctr"/>
-            <a:r>
-              <a:rPr sz="4400" b="1" i="0">
-                <a:solidFill>
-                  <a:srgbClr val="FFFFFF"/>
-                </a:solidFill>
-                <a:latin typeface="Arial"/>
-              </a:rPr>
-              <a:t>Nossos pecados são muitos</a:t>
-            </a:r>
-          </a:p>
-        </p:txBody>
-      </p:sp>
-      <p:sp>
-        <p:nvSpPr>
           <p:cNvPr id="5" name="TextBox 4"/>
           <p:cNvSpPr txBox="1"/>
           <p:nvPr/>
         </p:nvSpPr>
         <p:spPr>
           <a:xfrm>
-            <a:off x="594360" y="4251960"/>
-            <a:ext cx="11002975" cy="347472"/>
-          </a:xfrm>
-          <a:prstGeom prst="rect">
-            <a:avLst/>
-          </a:prstGeom>
-          <a:noFill/>
-        </p:spPr>
-        <p:txBody>
-          <a:bodyPr wrap="square">
-            <a:spAutoFit/>
-          </a:bodyPr>
-          <a:lstStyle/>
-          <a:p>
-            <a:pPr algn="ctr"/>
-            <a:r>
-              <a:rPr sz="2200" b="0" i="1">
-                <a:solidFill>
-                  <a:srgbClr val="8C8C8C"/>
+            <a:off x="640080" y="4494276"/>
+            <a:ext cx="10911535" cy="310896"/>
+          </a:xfrm>
+          <a:prstGeom prst="rect">
+            <a:avLst/>
+          </a:prstGeom>
+          <a:noFill/>
+        </p:spPr>
+        <p:txBody>
+          <a:bodyPr wrap="square">
+            <a:spAutoFit/>
+          </a:bodyPr>
+          <a:lstStyle/>
+          <a:p>
+            <a:pPr algn="ctr"/>
+            <a:r>
+              <a:rPr sz="2000" b="0" i="0">
+                <a:solidFill>
+                  <a:srgbClr val="828282"/>
                 </a:solidFill>
                 <a:latin typeface="Arial"/>
               </a:rPr>

--- a/output_pptx/His_Mercy_Is_More.pptx
+++ b/output_pptx/His_Mercy_Is_More.pptx
@@ -3392,6 +3392,41 @@
           </a:p>
         </p:txBody>
       </p:sp>
+      <p:sp>
+        <p:nvSpPr>
+          <p:cNvPr id="5" name="TextBox 4"/>
+          <p:cNvSpPr txBox="1"/>
+          <p:nvPr/>
+        </p:nvSpPr>
+        <p:spPr>
+          <a:xfrm>
+            <a:off x="640080" y="4494276"/>
+            <a:ext cx="10911535" cy="310896"/>
+          </a:xfrm>
+          <a:prstGeom prst="rect">
+            <a:avLst/>
+          </a:prstGeom>
+          <a:noFill/>
+        </p:spPr>
+        <p:txBody>
+          <a:bodyPr wrap="square">
+            <a:spAutoFit/>
+          </a:bodyPr>
+          <a:lstStyle/>
+          <a:p>
+            <a:pPr algn="ctr"/>
+            <a:r>
+              <a:rPr sz="2000" b="0" i="0">
+                <a:solidFill>
+                  <a:srgbClr val="828282"/>
+                </a:solidFill>
+                <a:latin typeface="Arial"/>
+              </a:rPr>
+              <a:t>あなたの慈悲はより大きい</a:t>
+            </a:r>
+          </a:p>
+        </p:txBody>
+      </p:sp>
     </p:spTree>
   </p:cSld>
   <p:clrMapOvr>
@@ -3488,6 +3523,76 @@
           </a:p>
         </p:txBody>
       </p:sp>
+      <p:sp>
+        <p:nvSpPr>
+          <p:cNvPr id="4" name="TextBox 3"/>
+          <p:cNvSpPr txBox="1"/>
+          <p:nvPr/>
+        </p:nvSpPr>
+        <p:spPr>
+          <a:xfrm>
+            <a:off x="640080" y="4128516"/>
+            <a:ext cx="10911535" cy="310896"/>
+          </a:xfrm>
+          <a:prstGeom prst="rect">
+            <a:avLst/>
+          </a:prstGeom>
+          <a:noFill/>
+        </p:spPr>
+        <p:txBody>
+          <a:bodyPr wrap="square">
+            <a:spAutoFit/>
+          </a:bodyPr>
+          <a:lstStyle/>
+          <a:p>
+            <a:pPr algn="ctr"/>
+            <a:r>
+              <a:rPr sz="2000" b="0" i="0">
+                <a:solidFill>
+                  <a:srgbClr val="828282"/>
+                </a:solidFill>
+                <a:latin typeface="Arial"/>
+              </a:rPr>
+              <a:t>あなたの慈悲はより大きい</a:t>
+            </a:r>
+          </a:p>
+        </p:txBody>
+      </p:sp>
+      <p:sp>
+        <p:nvSpPr>
+          <p:cNvPr id="5" name="TextBox 4"/>
+          <p:cNvSpPr txBox="1"/>
+          <p:nvPr/>
+        </p:nvSpPr>
+        <p:spPr>
+          <a:xfrm>
+            <a:off x="640080" y="4494276"/>
+            <a:ext cx="10911535" cy="310896"/>
+          </a:xfrm>
+          <a:prstGeom prst="rect">
+            <a:avLst/>
+          </a:prstGeom>
+          <a:noFill/>
+        </p:spPr>
+        <p:txBody>
+          <a:bodyPr wrap="square">
+            <a:spAutoFit/>
+          </a:bodyPr>
+          <a:lstStyle/>
+          <a:p>
+            <a:pPr algn="ctr"/>
+            <a:r>
+              <a:rPr sz="2000" b="0" i="0">
+                <a:solidFill>
+                  <a:srgbClr val="828282"/>
+                </a:solidFill>
+                <a:latin typeface="Arial"/>
+              </a:rPr>
+              <a:t>あなたの慈悲はより大きい</a:t>
+            </a:r>
+          </a:p>
+        </p:txBody>
+      </p:sp>
     </p:spTree>
   </p:cSld>
   <p:clrMapOvr>
@@ -4720,6 +4825,41 @@
           </a:p>
         </p:txBody>
       </p:sp>
+      <p:sp>
+        <p:nvSpPr>
+          <p:cNvPr id="3" name="TextBox 2"/>
+          <p:cNvSpPr txBox="1"/>
+          <p:nvPr/>
+        </p:nvSpPr>
+        <p:spPr>
+          <a:xfrm>
+            <a:off x="640080" y="3845052"/>
+            <a:ext cx="10911535" cy="310896"/>
+          </a:xfrm>
+          <a:prstGeom prst="rect">
+            <a:avLst/>
+          </a:prstGeom>
+          <a:noFill/>
+        </p:spPr>
+        <p:txBody>
+          <a:bodyPr wrap="square">
+            <a:spAutoFit/>
+          </a:bodyPr>
+          <a:lstStyle/>
+          <a:p>
+            <a:pPr algn="ctr"/>
+            <a:r>
+              <a:rPr sz="2000" b="0" i="0">
+                <a:solidFill>
+                  <a:srgbClr val="828282"/>
+                </a:solidFill>
+                <a:latin typeface="Arial"/>
+              </a:rPr>
+              <a:t>私たちの罪は多い</a:t>
+            </a:r>
+          </a:p>
+        </p:txBody>
+      </p:sp>
     </p:spTree>
   </p:cSld>
   <p:clrMapOvr>
@@ -5655,6 +5795,41 @@
           </a:p>
         </p:txBody>
       </p:sp>
+      <p:sp>
+        <p:nvSpPr>
+          <p:cNvPr id="5" name="TextBox 4"/>
+          <p:cNvSpPr txBox="1"/>
+          <p:nvPr/>
+        </p:nvSpPr>
+        <p:spPr>
+          <a:xfrm>
+            <a:off x="640080" y="4494276"/>
+            <a:ext cx="10911535" cy="310896"/>
+          </a:xfrm>
+          <a:prstGeom prst="rect">
+            <a:avLst/>
+          </a:prstGeom>
+          <a:noFill/>
+        </p:spPr>
+        <p:txBody>
+          <a:bodyPr wrap="square">
+            <a:spAutoFit/>
+          </a:bodyPr>
+          <a:lstStyle/>
+          <a:p>
+            <a:pPr algn="ctr"/>
+            <a:r>
+              <a:rPr sz="2000" b="0" i="0">
+                <a:solidFill>
+                  <a:srgbClr val="828282"/>
+                </a:solidFill>
+                <a:latin typeface="Arial"/>
+              </a:rPr>
+              <a:t>あなたの慈悲はより大きい</a:t>
+            </a:r>
+          </a:p>
+        </p:txBody>
+      </p:sp>
     </p:spTree>
   </p:cSld>
   <p:clrMapOvr>
@@ -5751,6 +5926,76 @@
           </a:p>
         </p:txBody>
       </p:sp>
+      <p:sp>
+        <p:nvSpPr>
+          <p:cNvPr id="4" name="TextBox 3"/>
+          <p:cNvSpPr txBox="1"/>
+          <p:nvPr/>
+        </p:nvSpPr>
+        <p:spPr>
+          <a:xfrm>
+            <a:off x="640080" y="4128516"/>
+            <a:ext cx="10911535" cy="310896"/>
+          </a:xfrm>
+          <a:prstGeom prst="rect">
+            <a:avLst/>
+          </a:prstGeom>
+          <a:noFill/>
+        </p:spPr>
+        <p:txBody>
+          <a:bodyPr wrap="square">
+            <a:spAutoFit/>
+          </a:bodyPr>
+          <a:lstStyle/>
+          <a:p>
+            <a:pPr algn="ctr"/>
+            <a:r>
+              <a:rPr sz="2000" b="0" i="0">
+                <a:solidFill>
+                  <a:srgbClr val="828282"/>
+                </a:solidFill>
+                <a:latin typeface="Arial"/>
+              </a:rPr>
+              <a:t>あなたの慈悲はより大きい</a:t>
+            </a:r>
+          </a:p>
+        </p:txBody>
+      </p:sp>
+      <p:sp>
+        <p:nvSpPr>
+          <p:cNvPr id="5" name="TextBox 4"/>
+          <p:cNvSpPr txBox="1"/>
+          <p:nvPr/>
+        </p:nvSpPr>
+        <p:spPr>
+          <a:xfrm>
+            <a:off x="640080" y="4494276"/>
+            <a:ext cx="10911535" cy="310896"/>
+          </a:xfrm>
+          <a:prstGeom prst="rect">
+            <a:avLst/>
+          </a:prstGeom>
+          <a:noFill/>
+        </p:spPr>
+        <p:txBody>
+          <a:bodyPr wrap="square">
+            <a:spAutoFit/>
+          </a:bodyPr>
+          <a:lstStyle/>
+          <a:p>
+            <a:pPr algn="ctr"/>
+            <a:r>
+              <a:rPr sz="2000" b="0" i="0">
+                <a:solidFill>
+                  <a:srgbClr val="828282"/>
+                </a:solidFill>
+                <a:latin typeface="Arial"/>
+              </a:rPr>
+              <a:t>あなたの慈悲はより大きい</a:t>
+            </a:r>
+          </a:p>
+        </p:txBody>
+      </p:sp>
     </p:spTree>
   </p:cSld>
   <p:clrMapOvr>
@@ -6048,6 +6293,41 @@
           </a:p>
         </p:txBody>
       </p:sp>
+      <p:sp>
+        <p:nvSpPr>
+          <p:cNvPr id="5" name="TextBox 4"/>
+          <p:cNvSpPr txBox="1"/>
+          <p:nvPr/>
+        </p:nvSpPr>
+        <p:spPr>
+          <a:xfrm>
+            <a:off x="640080" y="4494276"/>
+            <a:ext cx="10911535" cy="310896"/>
+          </a:xfrm>
+          <a:prstGeom prst="rect">
+            <a:avLst/>
+          </a:prstGeom>
+          <a:noFill/>
+        </p:spPr>
+        <p:txBody>
+          <a:bodyPr wrap="square">
+            <a:spAutoFit/>
+          </a:bodyPr>
+          <a:lstStyle/>
+          <a:p>
+            <a:pPr algn="ctr"/>
+            <a:r>
+              <a:rPr sz="2000" b="0" i="0">
+                <a:solidFill>
+                  <a:srgbClr val="828282"/>
+                </a:solidFill>
+                <a:latin typeface="Arial"/>
+              </a:rPr>
+              <a:t>あなたの慈悲はより大きい</a:t>
+            </a:r>
+          </a:p>
+        </p:txBody>
+      </p:sp>
     </p:spTree>
   </p:cSld>
   <p:clrMapOvr>
@@ -6144,6 +6424,76 @@
           </a:p>
         </p:txBody>
       </p:sp>
+      <p:sp>
+        <p:nvSpPr>
+          <p:cNvPr id="4" name="TextBox 3"/>
+          <p:cNvSpPr txBox="1"/>
+          <p:nvPr/>
+        </p:nvSpPr>
+        <p:spPr>
+          <a:xfrm>
+            <a:off x="640080" y="4128516"/>
+            <a:ext cx="10911535" cy="310896"/>
+          </a:xfrm>
+          <a:prstGeom prst="rect">
+            <a:avLst/>
+          </a:prstGeom>
+          <a:noFill/>
+        </p:spPr>
+        <p:txBody>
+          <a:bodyPr wrap="square">
+            <a:spAutoFit/>
+          </a:bodyPr>
+          <a:lstStyle/>
+          <a:p>
+            <a:pPr algn="ctr"/>
+            <a:r>
+              <a:rPr sz="2000" b="0" i="0">
+                <a:solidFill>
+                  <a:srgbClr val="828282"/>
+                </a:solidFill>
+                <a:latin typeface="Arial"/>
+              </a:rPr>
+              <a:t>あなたの慈悲はより大きい</a:t>
+            </a:r>
+          </a:p>
+        </p:txBody>
+      </p:sp>
+      <p:sp>
+        <p:nvSpPr>
+          <p:cNvPr id="5" name="TextBox 4"/>
+          <p:cNvSpPr txBox="1"/>
+          <p:nvPr/>
+        </p:nvSpPr>
+        <p:spPr>
+          <a:xfrm>
+            <a:off x="640080" y="4494276"/>
+            <a:ext cx="10911535" cy="310896"/>
+          </a:xfrm>
+          <a:prstGeom prst="rect">
+            <a:avLst/>
+          </a:prstGeom>
+          <a:noFill/>
+        </p:spPr>
+        <p:txBody>
+          <a:bodyPr wrap="square">
+            <a:spAutoFit/>
+          </a:bodyPr>
+          <a:lstStyle/>
+          <a:p>
+            <a:pPr algn="ctr"/>
+            <a:r>
+              <a:rPr sz="2000" b="0" i="0">
+                <a:solidFill>
+                  <a:srgbClr val="828282"/>
+                </a:solidFill>
+                <a:latin typeface="Arial"/>
+              </a:rPr>
+              <a:t>あなたの慈悲はより大きい</a:t>
+            </a:r>
+          </a:p>
+        </p:txBody>
+      </p:sp>
     </p:spTree>
   </p:cSld>
   <p:clrMapOvr>
@@ -6240,6 +6590,76 @@
           </a:p>
         </p:txBody>
       </p:sp>
+      <p:sp>
+        <p:nvSpPr>
+          <p:cNvPr id="4" name="TextBox 3"/>
+          <p:cNvSpPr txBox="1"/>
+          <p:nvPr/>
+        </p:nvSpPr>
+        <p:spPr>
+          <a:xfrm>
+            <a:off x="640080" y="4128516"/>
+            <a:ext cx="10911535" cy="310896"/>
+          </a:xfrm>
+          <a:prstGeom prst="rect">
+            <a:avLst/>
+          </a:prstGeom>
+          <a:noFill/>
+        </p:spPr>
+        <p:txBody>
+          <a:bodyPr wrap="square">
+            <a:spAutoFit/>
+          </a:bodyPr>
+          <a:lstStyle/>
+          <a:p>
+            <a:pPr algn="ctr"/>
+            <a:r>
+              <a:rPr sz="2000" b="0" i="0">
+                <a:solidFill>
+                  <a:srgbClr val="828282"/>
+                </a:solidFill>
+                <a:latin typeface="Arial"/>
+              </a:rPr>
+              <a:t>どんな心がこんなに愛することができるだろう</a:t>
+            </a:r>
+          </a:p>
+        </p:txBody>
+      </p:sp>
+      <p:sp>
+        <p:nvSpPr>
+          <p:cNvPr id="5" name="TextBox 4"/>
+          <p:cNvSpPr txBox="1"/>
+          <p:nvPr/>
+        </p:nvSpPr>
+        <p:spPr>
+          <a:xfrm>
+            <a:off x="640080" y="4494276"/>
+            <a:ext cx="10911535" cy="310896"/>
+          </a:xfrm>
+          <a:prstGeom prst="rect">
+            <a:avLst/>
+          </a:prstGeom>
+          <a:noFill/>
+        </p:spPr>
+        <p:txBody>
+          <a:bodyPr wrap="square">
+            <a:spAutoFit/>
+          </a:bodyPr>
+          <a:lstStyle/>
+          <a:p>
+            <a:pPr algn="ctr"/>
+            <a:r>
+              <a:rPr sz="2000" b="0" i="0">
+                <a:solidFill>
+                  <a:srgbClr val="828282"/>
+                </a:solidFill>
+                <a:latin typeface="Arial"/>
+              </a:rPr>
+              <a:t>決して私を諦めなかった</a:t>
+            </a:r>
+          </a:p>
+        </p:txBody>
+      </p:sp>
     </p:spTree>
   </p:cSld>
   <p:clrMapOvr>
@@ -7101,6 +7521,41 @@
                 <a:latin typeface="Arial"/>
               </a:rPr>
               <a:t>O que eu não mereço</a:t>
+            </a:r>
+          </a:p>
+        </p:txBody>
+      </p:sp>
+      <p:sp>
+        <p:nvSpPr>
+          <p:cNvPr id="3" name="TextBox 2"/>
+          <p:cNvSpPr txBox="1"/>
+          <p:nvPr/>
+        </p:nvSpPr>
+        <p:spPr>
+          <a:xfrm>
+            <a:off x="640080" y="3845052"/>
+            <a:ext cx="10911535" cy="310896"/>
+          </a:xfrm>
+          <a:prstGeom prst="rect">
+            <a:avLst/>
+          </a:prstGeom>
+          <a:noFill/>
+        </p:spPr>
+        <p:txBody>
+          <a:bodyPr wrap="square">
+            <a:spAutoFit/>
+          </a:bodyPr>
+          <a:lstStyle/>
+          <a:p>
+            <a:pPr algn="ctr"/>
+            <a:r>
+              <a:rPr sz="2000" b="0" i="0">
+                <a:solidFill>
+                  <a:srgbClr val="828282"/>
+                </a:solidFill>
+                <a:latin typeface="Arial"/>
+              </a:rPr>
+              <a:t>私が値しないもの</a:t>
             </a:r>
           </a:p>
         </p:txBody>
